--- a/20260930_サンクスLINEのご提案（簡易版）ver1.1.pptx
+++ b/20260930_サンクスLINEのご提案（簡易版）ver1.1.pptx
@@ -3477,43 +3477,6 @@
       </p:sp>
       <p:sp>
         <p:nvSpPr>
-          <p:cNvPr id="13" name="TextBox 12"/>
-          <p:cNvSpPr txBox="1"/>
-          <p:nvPr/>
-        </p:nvSpPr>
-        <p:spPr>
-          <a:xfrm>
-            <a:off x="432000" y="3547801"/>
-            <a:ext cx="4644000" cy="540000"/>
-          </a:xfrm>
-          <a:prstGeom prst="rect">
-            <a:avLst/>
-          </a:prstGeom>
-          <a:noFill/>
-        </p:spPr>
-        <p:txBody>
-          <a:bodyPr wrap="square" lIns="50400" tIns="21600" rIns="50400" bIns="21600" anchor="ctr">
-            <a:spAutoFit/>
-          </a:bodyPr>
-          <a:lstStyle/>
-          <a:p>
-            <a:pPr algn="ctr"/>
-            <a:r>
-              <a:rPr sz="1200" b="1">
-                <a:solidFill>
-                  <a:srgbClr val="1F285A"/>
-                </a:solidFill>
-                <a:latin typeface="メイリオ"/>
-                <a:ea typeface="メイリオ"/>
-                <a:cs typeface="メイリオ"/>
-              </a:rPr>
-              <a:t>広告の成果（申込み数）</a:t>
-            </a:r>
-          </a:p>
-        </p:txBody>
-      </p:sp>
-      <p:sp>
-        <p:nvSpPr>
           <p:cNvPr id="14" name="Rounded Rectangle 13"/>
           <p:cNvSpPr/>
           <p:nvPr/>
@@ -3581,16 +3544,16 @@
         </p:nvSpPr>
         <p:spPr>
           <a:xfrm>
-            <a:off x="5256000" y="1945800"/>
-            <a:ext cx="1872000" cy="288000"/>
+            <a:off x="5256000" y="2323800"/>
+            <a:ext cx="1872000" cy="1080000"/>
           </a:xfrm>
           <a:prstGeom prst="roundRect">
             <a:avLst>
-              <a:gd name="adj" fmla="val 18000"/>
+              <a:gd name="adj" fmla="val 10000"/>
             </a:avLst>
           </a:prstGeom>
           <a:solidFill>
-            <a:srgbClr val="ED7D31"/>
+            <a:srgbClr val="06C755"/>
           </a:solidFill>
           <a:ln>
             <a:noFill/>
@@ -3612,63 +3575,6 @@
           </a:fontRef>
         </p:style>
         <p:txBody>
-          <a:bodyPr rtlCol="0" anchor="ctr" wrap="square" lIns="36000" rIns="36000" tIns="0" bIns="0"/>
-          <a:lstStyle/>
-          <a:p>
-            <a:pPr algn="ctr"/>
-            <a:r>
-              <a:rPr sz="1200" b="1">
-                <a:solidFill>
-                  <a:srgbClr val="FFFFFF"/>
-                </a:solidFill>
-                <a:latin typeface="メイリオ"/>
-                <a:ea typeface="メイリオ"/>
-                <a:cs typeface="メイリオ"/>
-              </a:rPr>
-              <a:t>ここをLINEに</a:t>
-            </a:r>
-          </a:p>
-        </p:txBody>
-      </p:sp>
-      <p:sp>
-        <p:nvSpPr>
-          <p:cNvPr id="16" name="Rounded Rectangle 15"/>
-          <p:cNvSpPr/>
-          <p:nvPr/>
-        </p:nvSpPr>
-        <p:spPr>
-          <a:xfrm>
-            <a:off x="5256000" y="2323800"/>
-            <a:ext cx="1872000" cy="1080000"/>
-          </a:xfrm>
-          <a:prstGeom prst="roundRect">
-            <a:avLst>
-              <a:gd name="adj" fmla="val 10000"/>
-            </a:avLst>
-          </a:prstGeom>
-          <a:solidFill>
-            <a:srgbClr val="06C755"/>
-          </a:solidFill>
-          <a:ln>
-            <a:noFill/>
-          </a:ln>
-          <a:effectLst/>
-        </p:spPr>
-        <p:style>
-          <a:lnRef idx="1">
-            <a:schemeClr val="accent1"/>
-          </a:lnRef>
-          <a:fillRef idx="3">
-            <a:schemeClr val="accent1"/>
-          </a:fillRef>
-          <a:effectRef idx="2">
-            <a:schemeClr val="accent1"/>
-          </a:effectRef>
-          <a:fontRef idx="minor">
-            <a:schemeClr val="lt1"/>
-          </a:fontRef>
-        </p:style>
-        <p:txBody>
           <a:bodyPr rtlCol="0" anchor="ctr" wrap="square" lIns="54000" rIns="54000" tIns="18000" bIns="18000"/>
           <a:lstStyle/>
           <a:p>
@@ -3729,7 +3635,7 @@
       </p:sp>
       <p:sp>
         <p:nvSpPr>
-          <p:cNvPr id="17" name="Rounded Rectangle 16"/>
+          <p:cNvPr id="16" name="Rounded Rectangle 15"/>
           <p:cNvSpPr/>
           <p:nvPr/>
         </p:nvSpPr>
@@ -3810,22 +3716,22 @@
       </p:sp>
       <p:sp>
         <p:nvSpPr>
-          <p:cNvPr id="18" name="Rounded Rectangle 17"/>
+          <p:cNvPr id="17" name="Rounded Rectangle 16"/>
           <p:cNvSpPr/>
           <p:nvPr/>
         </p:nvSpPr>
         <p:spPr>
           <a:xfrm>
-            <a:off x="5256000" y="3547800"/>
-            <a:ext cx="4219200" cy="540000"/>
+            <a:off x="432000" y="3529800"/>
+            <a:ext cx="4284000" cy="306000"/>
           </a:xfrm>
           <a:prstGeom prst="roundRect">
             <a:avLst>
-              <a:gd name="adj" fmla="val 10000"/>
+              <a:gd name="adj" fmla="val 18000"/>
             </a:avLst>
           </a:prstGeom>
           <a:solidFill>
-            <a:srgbClr val="EDEDED"/>
+            <a:srgbClr val="1F285A"/>
           </a:solidFill>
           <a:ln>
             <a:noFill/>
@@ -3847,12 +3753,126 @@
           </a:fontRef>
         </p:style>
         <p:txBody>
+          <a:bodyPr rtlCol="0" anchor="ctr" wrap="square" lIns="36000" rIns="36000" tIns="0" bIns="0"/>
+          <a:lstStyle/>
+          <a:p>
+            <a:pPr algn="ctr"/>
+            <a:r>
+              <a:rPr sz="1200" b="1">
+                <a:solidFill>
+                  <a:srgbClr val="FFFFFF"/>
+                </a:solidFill>
+                <a:latin typeface="メイリオ"/>
+                <a:ea typeface="メイリオ"/>
+                <a:cs typeface="メイリオ"/>
+              </a:rPr>
+              <a:t>広告で追えるところ：申込みまで</a:t>
+            </a:r>
+          </a:p>
+        </p:txBody>
+      </p:sp>
+      <p:sp>
+        <p:nvSpPr>
+          <p:cNvPr id="18" name="Rounded Rectangle 17"/>
+          <p:cNvSpPr/>
+          <p:nvPr/>
+        </p:nvSpPr>
+        <p:spPr>
+          <a:xfrm>
+            <a:off x="5256000" y="3529800"/>
+            <a:ext cx="4219200" cy="306000"/>
+          </a:xfrm>
+          <a:prstGeom prst="roundRect">
+            <a:avLst>
+              <a:gd name="adj" fmla="val 18000"/>
+            </a:avLst>
+          </a:prstGeom>
+          <a:solidFill>
+            <a:srgbClr val="06C755"/>
+          </a:solidFill>
+          <a:ln>
+            <a:noFill/>
+          </a:ln>
+          <a:effectLst/>
+        </p:spPr>
+        <p:style>
+          <a:lnRef idx="1">
+            <a:schemeClr val="accent1"/>
+          </a:lnRef>
+          <a:fillRef idx="3">
+            <a:schemeClr val="accent1"/>
+          </a:fillRef>
+          <a:effectRef idx="2">
+            <a:schemeClr val="accent1"/>
+          </a:effectRef>
+          <a:fontRef idx="minor">
+            <a:schemeClr val="lt1"/>
+          </a:fontRef>
+        </p:style>
+        <p:txBody>
+          <a:bodyPr rtlCol="0" anchor="ctr" wrap="square" lIns="36000" rIns="36000" tIns="0" bIns="0"/>
+          <a:lstStyle/>
+          <a:p>
+            <a:pPr algn="ctr"/>
+            <a:r>
+              <a:rPr sz="1200" b="1">
+                <a:solidFill>
+                  <a:srgbClr val="FFFFFF"/>
+                </a:solidFill>
+                <a:latin typeface="メイリオ"/>
+                <a:ea typeface="メイリオ"/>
+                <a:cs typeface="メイリオ"/>
+              </a:rPr>
+              <a:t>LINEで追えるところ：来店・成約・リピートまで</a:t>
+            </a:r>
+          </a:p>
+        </p:txBody>
+      </p:sp>
+      <p:sp>
+        <p:nvSpPr>
+          <p:cNvPr id="19" name="Rounded Rectangle 18"/>
+          <p:cNvSpPr/>
+          <p:nvPr/>
+        </p:nvSpPr>
+        <p:spPr>
+          <a:xfrm>
+            <a:off x="5256000" y="3943800"/>
+            <a:ext cx="4219200" cy="396000"/>
+          </a:xfrm>
+          <a:prstGeom prst="roundRect">
+            <a:avLst>
+              <a:gd name="adj" fmla="val 10000"/>
+            </a:avLst>
+          </a:prstGeom>
+          <a:solidFill>
+            <a:srgbClr val="EDEDED"/>
+          </a:solidFill>
+          <a:ln>
+            <a:noFill/>
+          </a:ln>
+          <a:effectLst/>
+        </p:spPr>
+        <p:style>
+          <a:lnRef idx="1">
+            <a:schemeClr val="accent1"/>
+          </a:lnRef>
+          <a:fillRef idx="3">
+            <a:schemeClr val="accent1"/>
+          </a:fillRef>
+          <a:effectRef idx="2">
+            <a:schemeClr val="accent1"/>
+          </a:effectRef>
+          <a:fontRef idx="minor">
+            <a:schemeClr val="lt1"/>
+          </a:fontRef>
+        </p:style>
+        <p:txBody>
           <a:bodyPr rtlCol="0" anchor="ctr" wrap="square" lIns="50400" rIns="50400" tIns="21600" bIns="21600"/>
           <a:lstStyle/>
           <a:p>
             <a:pPr algn="ctr"/>
             <a:r>
-              <a:rPr sz="1200" b="1">
+              <a:rPr sz="1100" b="1">
                 <a:solidFill>
                   <a:srgbClr val="7F7F7F"/>
                 </a:solidFill>

--- a/20260930_サンクスLINEのご提案（簡易版）ver1.1.pptx
+++ b/20260930_サンクスLINEのご提案（簡易版）ver1.1.pptx
@@ -4987,8 +4987,8 @@
         </p:nvSpPr>
         <p:spPr>
           <a:xfrm>
-            <a:off x="432000" y="4860000"/>
-            <a:ext cx="9043200" cy="827999"/>
+            <a:off x="432000" y="4896000"/>
+            <a:ext cx="9043200" cy="432000"/>
           </a:xfrm>
           <a:prstGeom prst="roundRect">
             <a:avLst>
@@ -5035,8 +5035,8 @@
         </p:nvSpPr>
         <p:spPr>
           <a:xfrm>
-            <a:off x="576000" y="5112000"/>
-            <a:ext cx="936000" cy="324000"/>
+            <a:off x="540000" y="4986000"/>
+            <a:ext cx="648000" cy="251999"/>
           </a:xfrm>
           <a:prstGeom prst="roundRect">
             <a:avLst>
@@ -5071,7 +5071,7 @@
           <a:p>
             <a:pPr algn="ctr"/>
             <a:r>
-              <a:rPr sz="1300" b="1">
+              <a:rPr sz="1100" b="1">
                 <a:solidFill>
                   <a:srgbClr val="FFFFFF"/>
                 </a:solidFill>
@@ -5092,8 +5092,8 @@
         </p:nvSpPr>
         <p:spPr>
           <a:xfrm>
-            <a:off x="1620000" y="4932000"/>
-            <a:ext cx="3096000" cy="684000"/>
+            <a:off x="1295999" y="4896000"/>
+            <a:ext cx="3024000" cy="432000"/>
           </a:xfrm>
           <a:prstGeom prst="rect">
             <a:avLst/>
@@ -5106,13 +5106,9 @@
           </a:bodyPr>
           <a:lstStyle/>
           <a:p>
-            <a:pPr algn="l">
-              <a:spcAft>
-                <a:spcPts val="200"/>
-              </a:spcAft>
-            </a:pPr>
-            <a:r>
-              <a:rPr sz="1200" b="1">
+            <a:pPr algn="l"/>
+            <a:r>
+              <a:rPr sz="1050" b="1">
                 <a:solidFill>
                   <a:srgbClr val="333333"/>
                 </a:solidFill>
@@ -5123,7 +5119,7 @@
               <a:t>初期 </a:t>
             </a:r>
             <a:r>
-              <a:rPr sz="2000" b="1">
+              <a:rPr sz="1400" b="1">
                 <a:solidFill>
                   <a:srgbClr val="1F285A"/>
                 </a:solidFill>
@@ -5133,11 +5129,8 @@
               </a:rPr>
               <a:t>10万円</a:t>
             </a:r>
-          </a:p>
-          <a:p>
-            <a:pPr algn="l"/>
-            <a:r>
-              <a:rPr sz="1200" b="1">
+            <a:r>
+              <a:rPr sz="1050" b="1">
                 <a:solidFill>
                   <a:srgbClr val="333333"/>
                 </a:solidFill>
@@ -5145,10 +5138,10 @@
                 <a:ea typeface="メイリオ"/>
                 <a:cs typeface="メイリオ"/>
               </a:rPr>
-              <a:t>月額 </a:t>
-            </a:r>
-            <a:r>
-              <a:rPr sz="2000" b="1">
+              <a:t>　月額 </a:t>
+            </a:r>
+            <a:r>
+              <a:rPr sz="1400" b="1">
                 <a:solidFill>
                   <a:srgbClr val="1F285A"/>
                 </a:solidFill>
@@ -5169,8 +5162,8 @@
         </p:nvCxnSpPr>
         <p:spPr>
           <a:xfrm>
-            <a:off x="4716000" y="4986000"/>
-            <a:ext cx="0" cy="576000"/>
+            <a:off x="4356000" y="4986000"/>
+            <a:ext cx="0" cy="252000"/>
           </a:xfrm>
           <a:prstGeom prst="line">
             <a:avLst/>
@@ -5204,8 +5197,8 @@
         </p:nvSpPr>
         <p:spPr>
           <a:xfrm>
-            <a:off x="4860000" y="4932000"/>
-            <a:ext cx="4500000" cy="684000"/>
+            <a:off x="4463999" y="4896000"/>
+            <a:ext cx="4932000" cy="432000"/>
           </a:xfrm>
           <a:prstGeom prst="rect">
             <a:avLst/>
@@ -5220,11 +5213,11 @@
           <a:p>
             <a:pPr algn="l">
               <a:spcAft>
-                <a:spcPts val="600"/>
+                <a:spcPts val="100"/>
               </a:spcAft>
             </a:pPr>
             <a:r>
-              <a:rPr sz="1100">
+              <a:rPr sz="950">
                 <a:solidFill>
                   <a:srgbClr val="333333"/>
                 </a:solidFill>
@@ -5238,7 +5231,7 @@
           <a:p>
             <a:pPr algn="l"/>
             <a:r>
-              <a:rPr sz="1100">
+              <a:rPr sz="950">
                 <a:solidFill>
                   <a:srgbClr val="333333"/>
                 </a:solidFill>

--- a/20260930_サンクスLINEのご提案（簡易版）ver1.1.pptx
+++ b/20260930_サンクスLINEのご提案（簡易版）ver1.1.pptx
@@ -3087,68 +3087,42 @@
         </p:nvSpPr>
         <p:spPr>
           <a:xfrm>
-            <a:off x="432000" y="836230"/>
-            <a:ext cx="9036000" cy="307540"/>
+            <a:off x="432000" y="666000"/>
+            <a:ext cx="9043200" cy="558000"/>
           </a:xfrm>
           <a:prstGeom prst="rect">
             <a:avLst/>
           </a:prstGeom>
-          <a:noFill/>
-        </p:spPr>
-        <p:txBody>
-          <a:bodyPr wrap="square" lIns="0" tIns="21600" rIns="0" bIns="21600" anchor="ctr">
+          <a:solidFill>
+            <a:srgbClr val="F4F7FF"/>
+          </a:solidFill>
+          <a:ln w="12700">
+            <a:solidFill>
+              <a:srgbClr val="D9D9D9"/>
+            </a:solidFill>
+          </a:ln>
+        </p:spPr>
+        <p:txBody>
+          <a:bodyPr wrap="square" lIns="108000" tIns="21600" rIns="108000" bIns="21600" anchor="ctr">
             <a:spAutoFit/>
           </a:bodyPr>
           <a:lstStyle/>
           <a:p>
-            <a:pPr algn="l">
+            <a:pPr algn="ctr">
               <a:lnSpc>
-                <a:spcPct val="130000"/>
+                <a:spcPct val="125000"/>
               </a:lnSpc>
             </a:pPr>
             <a:r>
-              <a:rPr lang="en-US" altLang="ja-JP" sz="1400" dirty="0">
-                <a:solidFill>
-                  <a:srgbClr val="333333"/>
-                </a:solidFill>
-                <a:latin typeface="メイリオ"/>
-                <a:ea typeface="メイリオ"/>
-                <a:cs typeface="メイリオ"/>
-              </a:rPr>
-              <a:t>LINE</a:t>
-            </a:r>
-            <a:r>
-              <a:rPr lang="ja-JP" altLang="en-US" sz="1400" dirty="0">
-                <a:solidFill>
-                  <a:srgbClr val="333333"/>
-                </a:solidFill>
-                <a:latin typeface="メイリオ"/>
-                <a:ea typeface="メイリオ"/>
-                <a:cs typeface="メイリオ"/>
-              </a:rPr>
-              <a:t>で、</a:t>
-            </a:r>
-            <a:r>
-              <a:rPr sz="1400" dirty="0" err="1">
-                <a:solidFill>
-                  <a:srgbClr val="333333"/>
-                </a:solidFill>
-                <a:latin typeface="メイリオ"/>
-                <a:ea typeface="メイリオ"/>
-                <a:cs typeface="メイリオ"/>
-              </a:rPr>
-              <a:t>来店・成約・リピート</a:t>
-            </a:r>
-            <a:r>
-              <a:rPr lang="ja-JP" altLang="en-US" sz="1400" dirty="0">
-                <a:solidFill>
-                  <a:srgbClr val="333333"/>
-                </a:solidFill>
-                <a:latin typeface="メイリオ"/>
-                <a:ea typeface="メイリオ"/>
-                <a:cs typeface="メイリオ"/>
-              </a:rPr>
-              <a:t>まで追う</a:t>
+              <a:rPr sz="1400" b="1">
+                <a:solidFill>
+                  <a:srgbClr val="1F285A"/>
+                </a:solidFill>
+                <a:latin typeface="メイリオ"/>
+                <a:ea typeface="メイリオ"/>
+                <a:cs typeface="メイリオ"/>
+              </a:rPr>
+              <a:t>LINEで、来店・成約・リピートまで追う</a:t>
             </a:r>
             <a:endParaRPr sz="1400" dirty="0">
               <a:solidFill>
@@ -3161,41 +3135,6 @@
           </a:p>
         </p:txBody>
       </p:sp>
-      <p:cxnSp>
-        <p:nvCxnSpPr>
-          <p:cNvPr id="4" name="Connector 3"/>
-          <p:cNvCxnSpPr/>
-          <p:nvPr/>
-        </p:nvCxnSpPr>
-        <p:spPr>
-          <a:xfrm>
-            <a:off x="0" y="1389600"/>
-            <a:ext cx="9907200" cy="0"/>
-          </a:xfrm>
-          <a:prstGeom prst="line">
-            <a:avLst/>
-          </a:prstGeom>
-          <a:ln w="12700">
-            <a:solidFill>
-              <a:srgbClr val="D9D9D9"/>
-            </a:solidFill>
-          </a:ln>
-        </p:spPr>
-        <p:style>
-          <a:lnRef idx="2">
-            <a:schemeClr val="accent1"/>
-          </a:lnRef>
-          <a:fillRef idx="0">
-            <a:schemeClr val="accent1"/>
-          </a:fillRef>
-          <a:effectRef idx="1">
-            <a:schemeClr val="accent1"/>
-          </a:effectRef>
-          <a:fontRef idx="minor">
-            <a:schemeClr val="tx1"/>
-          </a:fontRef>
-        </p:style>
-      </p:cxnSp>
       <p:sp>
         <p:nvSpPr>
           <p:cNvPr id="5" name="Rounded Rectangle 4"/>
@@ -3204,7 +3143,7 @@
         </p:nvSpPr>
         <p:spPr>
           <a:xfrm>
-            <a:off x="432000" y="2323800"/>
+            <a:off x="432000" y="2259000"/>
             <a:ext cx="1872000" cy="1080000"/>
           </a:xfrm>
           <a:prstGeom prst="roundRect">
@@ -3267,7 +3206,7 @@
         </p:nvSpPr>
         <p:spPr>
           <a:xfrm>
-            <a:off x="2412000" y="2701801"/>
+            <a:off x="2412000" y="2637001"/>
             <a:ext cx="324000" cy="324000"/>
           </a:xfrm>
           <a:prstGeom prst="rightArrow">
@@ -3312,7 +3251,7 @@
         </p:nvSpPr>
         <p:spPr>
           <a:xfrm>
-            <a:off x="2844000" y="2323800"/>
+            <a:off x="2844000" y="2259000"/>
             <a:ext cx="1872000" cy="1080000"/>
           </a:xfrm>
           <a:prstGeom prst="roundRect">
@@ -3393,7 +3332,7 @@
         </p:nvSpPr>
         <p:spPr>
           <a:xfrm>
-            <a:off x="4824000" y="2701801"/>
+            <a:off x="4824000" y="2637001"/>
             <a:ext cx="324000" cy="324000"/>
           </a:xfrm>
           <a:prstGeom prst="rightArrow">
@@ -3438,7 +3377,7 @@
         </p:nvSpPr>
         <p:spPr>
           <a:xfrm>
-            <a:off x="7236000" y="2701801"/>
+            <a:off x="7236000" y="2637001"/>
             <a:ext cx="324000" cy="324000"/>
           </a:xfrm>
           <a:prstGeom prst="rightArrow">
@@ -3483,7 +3422,7 @@
         </p:nvSpPr>
         <p:spPr>
           <a:xfrm>
-            <a:off x="432000" y="4843801"/>
+            <a:off x="432000" y="4779001"/>
             <a:ext cx="9043200" cy="503999"/>
           </a:xfrm>
           <a:prstGeom prst="roundRect">
@@ -3544,7 +3483,7 @@
         </p:nvSpPr>
         <p:spPr>
           <a:xfrm>
-            <a:off x="5256000" y="2323800"/>
+            <a:off x="5256000" y="2259000"/>
             <a:ext cx="1872000" cy="1080000"/>
           </a:xfrm>
           <a:prstGeom prst="roundRect">
@@ -3641,7 +3580,7 @@
         </p:nvSpPr>
         <p:spPr>
           <a:xfrm>
-            <a:off x="7668000" y="2323800"/>
+            <a:off x="7668000" y="2259000"/>
             <a:ext cx="1807199" cy="1080000"/>
           </a:xfrm>
           <a:prstGeom prst="roundRect">
@@ -3722,7 +3661,7 @@
         </p:nvSpPr>
         <p:spPr>
           <a:xfrm>
-            <a:off x="432000" y="3529800"/>
+            <a:off x="432000" y="3465000"/>
             <a:ext cx="4284000" cy="306000"/>
           </a:xfrm>
           <a:prstGeom prst="roundRect">
@@ -3779,7 +3718,7 @@
         </p:nvSpPr>
         <p:spPr>
           <a:xfrm>
-            <a:off x="5256000" y="3529800"/>
+            <a:off x="5256000" y="3465000"/>
             <a:ext cx="4219200" cy="306000"/>
           </a:xfrm>
           <a:prstGeom prst="roundRect">
@@ -3836,7 +3775,7 @@
         </p:nvSpPr>
         <p:spPr>
           <a:xfrm>
-            <a:off x="5256000" y="3943800"/>
+            <a:off x="5256000" y="3879000"/>
             <a:ext cx="4219200" cy="396000"/>
           </a:xfrm>
           <a:prstGeom prst="roundRect">
@@ -3966,46 +3905,42 @@
         </p:nvSpPr>
         <p:spPr>
           <a:xfrm>
-            <a:off x="432000" y="696191"/>
-            <a:ext cx="9036000" cy="587617"/>
+            <a:off x="432000" y="666000"/>
+            <a:ext cx="9043200" cy="558000"/>
           </a:xfrm>
           <a:prstGeom prst="rect">
             <a:avLst/>
           </a:prstGeom>
-          <a:noFill/>
-        </p:spPr>
-        <p:txBody>
-          <a:bodyPr wrap="square" lIns="0" tIns="21600" rIns="0" bIns="21600" anchor="ctr">
+          <a:solidFill>
+            <a:srgbClr val="F4F7FF"/>
+          </a:solidFill>
+          <a:ln w="12700">
+            <a:solidFill>
+              <a:srgbClr val="D9D9D9"/>
+            </a:solidFill>
+          </a:ln>
+        </p:spPr>
+        <p:txBody>
+          <a:bodyPr wrap="square" lIns="108000" tIns="21600" rIns="108000" bIns="21600" anchor="ctr">
             <a:spAutoFit/>
           </a:bodyPr>
           <a:lstStyle/>
           <a:p>
-            <a:pPr algn="l">
+            <a:pPr algn="ctr">
               <a:lnSpc>
-                <a:spcPct val="130000"/>
+                <a:spcPct val="125000"/>
               </a:lnSpc>
             </a:pPr>
             <a:r>
-              <a:rPr sz="1400" dirty="0" err="1">
-                <a:solidFill>
-                  <a:srgbClr val="333333"/>
-                </a:solidFill>
-                <a:latin typeface="メイリオ"/>
-                <a:ea typeface="メイリオ"/>
-                <a:cs typeface="メイリオ"/>
-              </a:rPr>
-              <a:t>申込みの完了画面から、そのままLINEへ</a:t>
-            </a:r>
-            <a:r>
-              <a:rPr sz="1400" dirty="0">
-                <a:solidFill>
-                  <a:srgbClr val="333333"/>
-                </a:solidFill>
-                <a:latin typeface="メイリオ"/>
-                <a:ea typeface="メイリオ"/>
-                <a:cs typeface="メイリオ"/>
-              </a:rPr>
-              <a:t>。</a:t>
+              <a:rPr sz="1300" b="1">
+                <a:solidFill>
+                  <a:srgbClr val="1F285A"/>
+                </a:solidFill>
+                <a:latin typeface="メイリオ"/>
+                <a:ea typeface="メイリオ"/>
+                <a:cs typeface="メイリオ"/>
+              </a:rPr>
+              <a:t>申込みの完了画面から、そのままLINEへ。</a:t>
             </a:r>
             <a:endParaRPr lang="en-US" sz="1400" dirty="0">
               <a:solidFill>
@@ -4017,101 +3952,25 @@
             </a:endParaRPr>
           </a:p>
           <a:p>
-            <a:pPr algn="l">
+            <a:pPr algn="ctr">
               <a:lnSpc>
-                <a:spcPct val="130000"/>
+                <a:spcPct val="125000"/>
               </a:lnSpc>
             </a:pPr>
             <a:r>
-              <a:rPr sz="1400" dirty="0" err="1">
-                <a:solidFill>
-                  <a:srgbClr val="333333"/>
-                </a:solidFill>
-                <a:latin typeface="メイリオ"/>
-                <a:ea typeface="メイリオ"/>
-                <a:cs typeface="メイリオ"/>
-              </a:rPr>
-              <a:t>関心が一番高いタイミング</a:t>
-            </a:r>
-            <a:r>
-              <a:rPr lang="ja-JP" altLang="en-US" sz="1400" dirty="0">
-                <a:solidFill>
-                  <a:srgbClr val="333333"/>
-                </a:solidFill>
-                <a:latin typeface="メイリオ"/>
-                <a:ea typeface="メイリオ"/>
-                <a:cs typeface="メイリオ"/>
-              </a:rPr>
-              <a:t>＝</a:t>
-            </a:r>
-            <a:r>
-              <a:rPr sz="1400" dirty="0" err="1">
-                <a:solidFill>
-                  <a:srgbClr val="333333"/>
-                </a:solidFill>
-                <a:latin typeface="メイリオ"/>
-                <a:ea typeface="メイリオ"/>
-                <a:cs typeface="メイリオ"/>
-              </a:rPr>
-              <a:t>友だちに</a:t>
-            </a:r>
-            <a:r>
-              <a:rPr lang="ja-JP" altLang="en-US" sz="1400" dirty="0">
-                <a:solidFill>
-                  <a:srgbClr val="333333"/>
-                </a:solidFill>
-                <a:latin typeface="メイリオ"/>
-                <a:ea typeface="メイリオ"/>
-                <a:cs typeface="メイリオ"/>
-              </a:rPr>
-              <a:t>なりやすい</a:t>
-            </a:r>
-            <a:endParaRPr sz="1400" dirty="0">
-              <a:solidFill>
-                <a:srgbClr val="333333"/>
-              </a:solidFill>
-              <a:latin typeface="メイリオ"/>
-              <a:ea typeface="メイリオ"/>
-              <a:cs typeface="メイリオ"/>
-            </a:endParaRPr>
-          </a:p>
-        </p:txBody>
-      </p:sp>
-      <p:cxnSp>
-        <p:nvCxnSpPr>
-          <p:cNvPr id="4" name="Connector 3"/>
-          <p:cNvCxnSpPr/>
-          <p:nvPr/>
-        </p:nvCxnSpPr>
-        <p:spPr>
-          <a:xfrm>
-            <a:off x="0" y="1389600"/>
-            <a:ext cx="9907200" cy="0"/>
-          </a:xfrm>
-          <a:prstGeom prst="line">
-            <a:avLst/>
-          </a:prstGeom>
-          <a:ln w="12700">
-            <a:solidFill>
-              <a:srgbClr val="D9D9D9"/>
-            </a:solidFill>
-          </a:ln>
-        </p:spPr>
-        <p:style>
-          <a:lnRef idx="2">
-            <a:schemeClr val="accent1"/>
-          </a:lnRef>
-          <a:fillRef idx="0">
-            <a:schemeClr val="accent1"/>
-          </a:fillRef>
-          <a:effectRef idx="1">
-            <a:schemeClr val="accent1"/>
-          </a:effectRef>
-          <a:fontRef idx="minor">
-            <a:schemeClr val="tx1"/>
-          </a:fontRef>
-        </p:style>
-      </p:cxnSp>
+              <a:rPr sz="1300" b="1">
+                <a:solidFill>
+                  <a:srgbClr val="1F285A"/>
+                </a:solidFill>
+                <a:latin typeface="メイリオ"/>
+                <a:ea typeface="メイリオ"/>
+                <a:cs typeface="メイリオ"/>
+              </a:rPr>
+              <a:t>関心が一番高いタイミング＝友だちになりやすい</a:t>
+            </a:r>
+          </a:p>
+        </p:txBody>
+      </p:sp>
       <p:sp>
         <p:nvSpPr>
           <p:cNvPr id="5" name="Rounded Rectangle 4"/>
@@ -4120,7 +3979,7 @@
         </p:nvSpPr>
         <p:spPr>
           <a:xfrm>
-            <a:off x="432000" y="2485800"/>
+            <a:off x="432000" y="2349900"/>
             <a:ext cx="1584000" cy="936000"/>
           </a:xfrm>
           <a:prstGeom prst="roundRect">
@@ -4183,7 +4042,7 @@
         </p:nvSpPr>
         <p:spPr>
           <a:xfrm>
-            <a:off x="2088000" y="2791800"/>
+            <a:off x="2088000" y="2655900"/>
             <a:ext cx="288000" cy="324000"/>
           </a:xfrm>
           <a:prstGeom prst="rightArrow">
@@ -4228,7 +4087,7 @@
         </p:nvSpPr>
         <p:spPr>
           <a:xfrm>
-            <a:off x="2448000" y="2485800"/>
+            <a:off x="2448000" y="2349900"/>
             <a:ext cx="1764000" cy="936000"/>
           </a:xfrm>
           <a:prstGeom prst="roundRect">
@@ -4309,7 +4168,7 @@
         </p:nvSpPr>
         <p:spPr>
           <a:xfrm>
-            <a:off x="4284000" y="2791800"/>
+            <a:off x="4284000" y="2655900"/>
             <a:ext cx="288000" cy="324000"/>
           </a:xfrm>
           <a:prstGeom prst="rightArrow">
@@ -4354,7 +4213,7 @@
         </p:nvSpPr>
         <p:spPr>
           <a:xfrm>
-            <a:off x="4644000" y="2485800"/>
+            <a:off x="4644000" y="2349900"/>
             <a:ext cx="1296000" cy="936000"/>
           </a:xfrm>
           <a:prstGeom prst="roundRect">
@@ -4449,7 +4308,7 @@
         </p:nvSpPr>
         <p:spPr>
           <a:xfrm>
-            <a:off x="6012000" y="2791800"/>
+            <a:off x="6012000" y="2655900"/>
             <a:ext cx="288000" cy="324000"/>
           </a:xfrm>
           <a:prstGeom prst="rightArrow">
@@ -4494,7 +4353,7 @@
         </p:nvSpPr>
         <p:spPr>
           <a:xfrm>
-            <a:off x="6372000" y="2485800"/>
+            <a:off x="6372000" y="2349900"/>
             <a:ext cx="3103199" cy="432000"/>
           </a:xfrm>
           <a:prstGeom prst="roundRect">
@@ -4557,7 +4416,7 @@
         </p:nvSpPr>
         <p:spPr>
           <a:xfrm>
-            <a:off x="6372000" y="2989801"/>
+            <a:off x="6372000" y="2853901"/>
             <a:ext cx="3103199" cy="432000"/>
           </a:xfrm>
           <a:prstGeom prst="roundRect">
@@ -4620,7 +4479,7 @@
         </p:nvSpPr>
         <p:spPr>
           <a:xfrm>
-            <a:off x="432000" y="3709801"/>
+            <a:off x="432000" y="3573901"/>
             <a:ext cx="2951999" cy="936000"/>
           </a:xfrm>
           <a:prstGeom prst="roundRect">
@@ -4729,7 +4588,7 @@
         </p:nvSpPr>
         <p:spPr>
           <a:xfrm>
-            <a:off x="3477599" y="3709801"/>
+            <a:off x="3477599" y="3573901"/>
             <a:ext cx="2951999" cy="936000"/>
           </a:xfrm>
           <a:prstGeom prst="roundRect">
@@ -4878,7 +4737,7 @@
         </p:nvSpPr>
         <p:spPr>
           <a:xfrm>
-            <a:off x="6523199" y="3709801"/>
+            <a:off x="6523199" y="3573901"/>
             <a:ext cx="2951999" cy="936000"/>
           </a:xfrm>
           <a:prstGeom prst="roundRect">
@@ -4987,8 +4846,8 @@
         </p:nvSpPr>
         <p:spPr>
           <a:xfrm>
-            <a:off x="432000" y="4896000"/>
-            <a:ext cx="9043200" cy="432000"/>
+            <a:off x="1425600" y="4760100"/>
+            <a:ext cx="7056000" cy="432000"/>
           </a:xfrm>
           <a:prstGeom prst="roundRect">
             <a:avLst>
@@ -5035,7 +4894,7 @@
         </p:nvSpPr>
         <p:spPr>
           <a:xfrm>
-            <a:off x="540000" y="4986000"/>
+            <a:off x="1533600" y="4850100"/>
             <a:ext cx="648000" cy="251999"/>
           </a:xfrm>
           <a:prstGeom prst="roundRect">
@@ -5092,8 +4951,8 @@
         </p:nvSpPr>
         <p:spPr>
           <a:xfrm>
-            <a:off x="1295999" y="4896000"/>
-            <a:ext cx="3024000" cy="432000"/>
+            <a:off x="2253600" y="4760100"/>
+            <a:ext cx="2520000" cy="432000"/>
           </a:xfrm>
           <a:prstGeom prst="rect">
             <a:avLst/>
@@ -5162,7 +5021,7 @@
         </p:nvCxnSpPr>
         <p:spPr>
           <a:xfrm>
-            <a:off x="4356000" y="4986000"/>
+            <a:off x="4845600" y="4850100"/>
             <a:ext cx="0" cy="252000"/>
           </a:xfrm>
           <a:prstGeom prst="line">
@@ -5197,8 +5056,8 @@
         </p:nvSpPr>
         <p:spPr>
           <a:xfrm>
-            <a:off x="4463999" y="4896000"/>
-            <a:ext cx="4932000" cy="432000"/>
+            <a:off x="4953600" y="4760100"/>
+            <a:ext cx="3491999" cy="432000"/>
           </a:xfrm>
           <a:prstGeom prst="rect">
             <a:avLst/>
@@ -5319,46 +5178,42 @@
         </p:nvSpPr>
         <p:spPr>
           <a:xfrm>
-            <a:off x="432000" y="836230"/>
-            <a:ext cx="9036000" cy="307540"/>
+            <a:off x="432000" y="666000"/>
+            <a:ext cx="9043200" cy="558000"/>
           </a:xfrm>
           <a:prstGeom prst="rect">
             <a:avLst/>
           </a:prstGeom>
-          <a:noFill/>
-        </p:spPr>
-        <p:txBody>
-          <a:bodyPr wrap="square" lIns="0" tIns="21600" rIns="0" bIns="21600" anchor="ctr">
+          <a:solidFill>
+            <a:srgbClr val="F4F7FF"/>
+          </a:solidFill>
+          <a:ln w="12700">
+            <a:solidFill>
+              <a:srgbClr val="D9D9D9"/>
+            </a:solidFill>
+          </a:ln>
+        </p:spPr>
+        <p:txBody>
+          <a:bodyPr wrap="square" lIns="108000" tIns="21600" rIns="108000" bIns="21600" anchor="ctr">
             <a:spAutoFit/>
           </a:bodyPr>
           <a:lstStyle/>
           <a:p>
-            <a:pPr algn="l">
+            <a:pPr algn="ctr">
               <a:lnSpc>
-                <a:spcPct val="130000"/>
+                <a:spcPct val="125000"/>
               </a:lnSpc>
             </a:pPr>
             <a:r>
-              <a:rPr sz="1400" dirty="0" err="1">
-                <a:solidFill>
-                  <a:srgbClr val="333333"/>
-                </a:solidFill>
-                <a:latin typeface="メイリオ"/>
-                <a:ea typeface="メイリオ"/>
-                <a:cs typeface="メイリオ"/>
-              </a:rPr>
-              <a:t>申込んだ方に合わせて、LINEで次の一歩</a:t>
-            </a:r>
-            <a:r>
-              <a:rPr lang="ja-JP" altLang="en-US" sz="1400" dirty="0">
-                <a:solidFill>
-                  <a:srgbClr val="333333"/>
-                </a:solidFill>
-                <a:latin typeface="メイリオ"/>
-                <a:ea typeface="メイリオ"/>
-                <a:cs typeface="メイリオ"/>
-              </a:rPr>
-              <a:t>へとつなげる</a:t>
+              <a:rPr sz="1400" b="1">
+                <a:solidFill>
+                  <a:srgbClr val="1F285A"/>
+                </a:solidFill>
+                <a:latin typeface="メイリオ"/>
+                <a:ea typeface="メイリオ"/>
+                <a:cs typeface="メイリオ"/>
+              </a:rPr>
+              <a:t>申込んだ方に合わせて、LINEで次の一歩へとつなげる</a:t>
             </a:r>
             <a:endParaRPr sz="1400" dirty="0">
               <a:solidFill>
@@ -5371,41 +5226,6 @@
           </a:p>
         </p:txBody>
       </p:sp>
-      <p:cxnSp>
-        <p:nvCxnSpPr>
-          <p:cNvPr id="4" name="Connector 3"/>
-          <p:cNvCxnSpPr/>
-          <p:nvPr/>
-        </p:nvCxnSpPr>
-        <p:spPr>
-          <a:xfrm>
-            <a:off x="0" y="1389600"/>
-            <a:ext cx="9907200" cy="0"/>
-          </a:xfrm>
-          <a:prstGeom prst="line">
-            <a:avLst/>
-          </a:prstGeom>
-          <a:ln w="12700">
-            <a:solidFill>
-              <a:srgbClr val="D9D9D9"/>
-            </a:solidFill>
-          </a:ln>
-        </p:spPr>
-        <p:style>
-          <a:lnRef idx="2">
-            <a:schemeClr val="accent1"/>
-          </a:lnRef>
-          <a:fillRef idx="0">
-            <a:schemeClr val="accent1"/>
-          </a:fillRef>
-          <a:effectRef idx="1">
-            <a:schemeClr val="accent1"/>
-          </a:effectRef>
-          <a:fontRef idx="minor">
-            <a:schemeClr val="tx1"/>
-          </a:fontRef>
-        </p:style>
-      </p:cxnSp>
       <p:sp>
         <p:nvSpPr>
           <p:cNvPr id="5" name="Rounded Rectangle 4"/>
@@ -5414,7 +5234,7 @@
         </p:nvSpPr>
         <p:spPr>
           <a:xfrm>
-            <a:off x="432000" y="2215800"/>
+            <a:off x="432000" y="2151000"/>
             <a:ext cx="2951999" cy="503999"/>
           </a:xfrm>
           <a:prstGeom prst="roundRect">
@@ -5475,7 +5295,7 @@
         </p:nvSpPr>
         <p:spPr>
           <a:xfrm>
-            <a:off x="1692000" y="2773801"/>
+            <a:off x="1692000" y="2709001"/>
             <a:ext cx="432000" cy="251999"/>
           </a:xfrm>
           <a:prstGeom prst="downArrow">
@@ -5520,7 +5340,7 @@
         </p:nvSpPr>
         <p:spPr>
           <a:xfrm>
-            <a:off x="432000" y="3079801"/>
+            <a:off x="432000" y="3015001"/>
             <a:ext cx="2951999" cy="648000"/>
           </a:xfrm>
           <a:prstGeom prst="roundRect">
@@ -5583,7 +5403,7 @@
         </p:nvSpPr>
         <p:spPr>
           <a:xfrm>
-            <a:off x="1692000" y="3781800"/>
+            <a:off x="1692000" y="3717000"/>
             <a:ext cx="432000" cy="251999"/>
           </a:xfrm>
           <a:prstGeom prst="downArrow">
@@ -5628,7 +5448,7 @@
         </p:nvSpPr>
         <p:spPr>
           <a:xfrm>
-            <a:off x="432000" y="4087801"/>
+            <a:off x="432000" y="4023001"/>
             <a:ext cx="2951999" cy="503999"/>
           </a:xfrm>
           <a:prstGeom prst="roundRect">
@@ -5689,7 +5509,7 @@
         </p:nvSpPr>
         <p:spPr>
           <a:xfrm>
-            <a:off x="3477599" y="2215800"/>
+            <a:off x="3477599" y="2151000"/>
             <a:ext cx="2951999" cy="503999"/>
           </a:xfrm>
           <a:prstGeom prst="roundRect">
@@ -5750,7 +5570,7 @@
         </p:nvSpPr>
         <p:spPr>
           <a:xfrm>
-            <a:off x="4737599" y="2773801"/>
+            <a:off x="4737599" y="2709001"/>
             <a:ext cx="432000" cy="251999"/>
           </a:xfrm>
           <a:prstGeom prst="downArrow">
@@ -5795,7 +5615,7 @@
         </p:nvSpPr>
         <p:spPr>
           <a:xfrm>
-            <a:off x="3477599" y="3079801"/>
+            <a:off x="3477599" y="3015001"/>
             <a:ext cx="2951999" cy="648000"/>
           </a:xfrm>
           <a:prstGeom prst="roundRect">
@@ -5858,7 +5678,7 @@
         </p:nvSpPr>
         <p:spPr>
           <a:xfrm>
-            <a:off x="4737599" y="3781800"/>
+            <a:off x="4737599" y="3717000"/>
             <a:ext cx="432000" cy="251999"/>
           </a:xfrm>
           <a:prstGeom prst="downArrow">
@@ -5903,7 +5723,7 @@
         </p:nvSpPr>
         <p:spPr>
           <a:xfrm>
-            <a:off x="3477599" y="4087801"/>
+            <a:off x="3477599" y="4023001"/>
             <a:ext cx="2951999" cy="503999"/>
           </a:xfrm>
           <a:prstGeom prst="roundRect">
@@ -5964,7 +5784,7 @@
         </p:nvSpPr>
         <p:spPr>
           <a:xfrm>
-            <a:off x="6523199" y="2215800"/>
+            <a:off x="6523199" y="2151000"/>
             <a:ext cx="2951999" cy="503999"/>
           </a:xfrm>
           <a:prstGeom prst="roundRect">
@@ -6025,7 +5845,7 @@
         </p:nvSpPr>
         <p:spPr>
           <a:xfrm>
-            <a:off x="7783199" y="2773801"/>
+            <a:off x="7783199" y="2709001"/>
             <a:ext cx="432000" cy="251999"/>
           </a:xfrm>
           <a:prstGeom prst="downArrow">
@@ -6070,7 +5890,7 @@
         </p:nvSpPr>
         <p:spPr>
           <a:xfrm>
-            <a:off x="6523199" y="3079801"/>
+            <a:off x="6523199" y="3015001"/>
             <a:ext cx="2951999" cy="648000"/>
           </a:xfrm>
           <a:prstGeom prst="roundRect">
@@ -6133,7 +5953,7 @@
         </p:nvSpPr>
         <p:spPr>
           <a:xfrm>
-            <a:off x="7783199" y="3781800"/>
+            <a:off x="7783199" y="3717000"/>
             <a:ext cx="432000" cy="251999"/>
           </a:xfrm>
           <a:prstGeom prst="downArrow">
@@ -6178,7 +5998,7 @@
         </p:nvSpPr>
         <p:spPr>
           <a:xfrm>
-            <a:off x="6523199" y="4087801"/>
+            <a:off x="6523199" y="4023001"/>
             <a:ext cx="2951999" cy="503999"/>
           </a:xfrm>
           <a:prstGeom prst="roundRect">
@@ -6280,7 +6100,7 @@
         </p:nvSpPr>
         <p:spPr>
           <a:xfrm>
-            <a:off x="432000" y="4951801"/>
+            <a:off x="432000" y="4887001"/>
             <a:ext cx="9043200" cy="503999"/>
           </a:xfrm>
           <a:prstGeom prst="roundRect">
@@ -6408,46 +6228,42 @@
         </p:nvSpPr>
         <p:spPr>
           <a:xfrm>
-            <a:off x="432000" y="836230"/>
-            <a:ext cx="9036000" cy="307540"/>
+            <a:off x="432000" y="666000"/>
+            <a:ext cx="9043200" cy="558000"/>
           </a:xfrm>
           <a:prstGeom prst="rect">
             <a:avLst/>
           </a:prstGeom>
-          <a:noFill/>
-        </p:spPr>
-        <p:txBody>
-          <a:bodyPr wrap="square" lIns="0" tIns="21600" rIns="0" bIns="21600" anchor="ctr">
+          <a:solidFill>
+            <a:srgbClr val="F4F7FF"/>
+          </a:solidFill>
+          <a:ln w="12700">
+            <a:solidFill>
+              <a:srgbClr val="D9D9D9"/>
+            </a:solidFill>
+          </a:ln>
+        </p:spPr>
+        <p:txBody>
+          <a:bodyPr wrap="square" lIns="108000" tIns="21600" rIns="108000" bIns="21600" anchor="ctr">
             <a:spAutoFit/>
           </a:bodyPr>
           <a:lstStyle/>
           <a:p>
-            <a:pPr algn="l">
+            <a:pPr algn="ctr">
               <a:lnSpc>
-                <a:spcPct val="130000"/>
+                <a:spcPct val="125000"/>
               </a:lnSpc>
             </a:pPr>
             <a:r>
-              <a:rPr sz="1400" dirty="0" err="1">
-                <a:solidFill>
-                  <a:srgbClr val="333333"/>
-                </a:solidFill>
-                <a:latin typeface="メイリオ"/>
-                <a:ea typeface="メイリオ"/>
-                <a:cs typeface="メイリオ"/>
-              </a:rPr>
-              <a:t>同じ広告費のまま、申込みの「後」を伸ばして成約</a:t>
-            </a:r>
-            <a:r>
-              <a:rPr lang="ja-JP" altLang="en-US" sz="1400" dirty="0">
-                <a:solidFill>
-                  <a:srgbClr val="333333"/>
-                </a:solidFill>
-                <a:latin typeface="メイリオ"/>
-                <a:ea typeface="メイリオ"/>
-                <a:cs typeface="メイリオ"/>
-              </a:rPr>
-              <a:t>数増加へ</a:t>
+              <a:rPr sz="1400" b="1">
+                <a:solidFill>
+                  <a:srgbClr val="1F285A"/>
+                </a:solidFill>
+                <a:latin typeface="メイリオ"/>
+                <a:ea typeface="メイリオ"/>
+                <a:cs typeface="メイリオ"/>
+              </a:rPr>
+              <a:t>同じ広告費のまま、申込みの「後」を伸ばして成約数増加へ</a:t>
             </a:r>
             <a:endParaRPr sz="1400" dirty="0">
               <a:solidFill>
@@ -6460,41 +6276,6 @@
           </a:p>
         </p:txBody>
       </p:sp>
-      <p:cxnSp>
-        <p:nvCxnSpPr>
-          <p:cNvPr id="4" name="Connector 3"/>
-          <p:cNvCxnSpPr/>
-          <p:nvPr/>
-        </p:nvCxnSpPr>
-        <p:spPr>
-          <a:xfrm>
-            <a:off x="0" y="1389600"/>
-            <a:ext cx="9907200" cy="0"/>
-          </a:xfrm>
-          <a:prstGeom prst="line">
-            <a:avLst/>
-          </a:prstGeom>
-          <a:ln w="12700">
-            <a:solidFill>
-              <a:srgbClr val="D9D9D9"/>
-            </a:solidFill>
-          </a:ln>
-        </p:spPr>
-        <p:style>
-          <a:lnRef idx="2">
-            <a:schemeClr val="accent1"/>
-          </a:lnRef>
-          <a:fillRef idx="0">
-            <a:schemeClr val="accent1"/>
-          </a:fillRef>
-          <a:effectRef idx="1">
-            <a:schemeClr val="accent1"/>
-          </a:effectRef>
-          <a:fontRef idx="minor">
-            <a:schemeClr val="tx1"/>
-          </a:fontRef>
-        </p:style>
-      </p:cxnSp>
       <p:sp>
         <p:nvSpPr>
           <p:cNvPr id="5" name="Rounded Rectangle 4"/>
@@ -6503,7 +6284,7 @@
         </p:nvSpPr>
         <p:spPr>
           <a:xfrm>
-            <a:off x="1584000" y="2287800"/>
+            <a:off x="1584000" y="2223001"/>
             <a:ext cx="3204000" cy="270000"/>
           </a:xfrm>
           <a:prstGeom prst="roundRect">
@@ -6560,7 +6341,7 @@
         </p:nvSpPr>
         <p:spPr>
           <a:xfrm>
-            <a:off x="4896000" y="2287800"/>
+            <a:off x="4896000" y="2223001"/>
             <a:ext cx="4579200" cy="270000"/>
           </a:xfrm>
           <a:prstGeom prst="roundRect">
@@ -6617,7 +6398,7 @@
         </p:nvSpPr>
         <p:spPr>
           <a:xfrm>
-            <a:off x="432000" y="2683800"/>
+            <a:off x="432000" y="2619001"/>
             <a:ext cx="1044000" cy="864000"/>
           </a:xfrm>
           <a:prstGeom prst="roundRect">
@@ -6678,7 +6459,7 @@
         </p:nvSpPr>
         <p:spPr>
           <a:xfrm>
-            <a:off x="1584000" y="2683800"/>
+            <a:off x="1584000" y="2619001"/>
             <a:ext cx="3204000" cy="864000"/>
           </a:xfrm>
           <a:prstGeom prst="roundRect">
@@ -6759,7 +6540,7 @@
         </p:nvSpPr>
         <p:spPr>
           <a:xfrm>
-            <a:off x="4860000" y="2953800"/>
+            <a:off x="4860000" y="2889001"/>
             <a:ext cx="288000" cy="324000"/>
           </a:xfrm>
           <a:prstGeom prst="rightArrow">
@@ -6804,7 +6585,7 @@
         </p:nvSpPr>
         <p:spPr>
           <a:xfrm>
-            <a:off x="5220000" y="2683800"/>
+            <a:off x="5220000" y="2619001"/>
             <a:ext cx="1944000" cy="864000"/>
           </a:xfrm>
           <a:prstGeom prst="roundRect">
@@ -6868,7 +6649,7 @@
         </p:nvSpPr>
         <p:spPr>
           <a:xfrm>
-            <a:off x="7236000" y="2953800"/>
+            <a:off x="7236000" y="2889001"/>
             <a:ext cx="288000" cy="324000"/>
           </a:xfrm>
           <a:prstGeom prst="rightArrow">
@@ -6913,7 +6694,7 @@
         </p:nvSpPr>
         <p:spPr>
           <a:xfrm>
-            <a:off x="7596000" y="2683800"/>
+            <a:off x="7596000" y="2619001"/>
             <a:ext cx="1879200" cy="864000"/>
           </a:xfrm>
           <a:prstGeom prst="roundRect">
@@ -6992,7 +6773,7 @@
         </p:nvSpPr>
         <p:spPr>
           <a:xfrm>
-            <a:off x="432000" y="3727800"/>
+            <a:off x="432000" y="3663001"/>
             <a:ext cx="1044000" cy="864000"/>
           </a:xfrm>
           <a:prstGeom prst="roundRect">
@@ -7071,7 +6852,7 @@
         </p:nvSpPr>
         <p:spPr>
           <a:xfrm>
-            <a:off x="1584000" y="3727800"/>
+            <a:off x="1584000" y="3663001"/>
             <a:ext cx="3204000" cy="864000"/>
           </a:xfrm>
           <a:prstGeom prst="roundRect">
@@ -7152,7 +6933,7 @@
         </p:nvSpPr>
         <p:spPr>
           <a:xfrm>
-            <a:off x="4860000" y="3997800"/>
+            <a:off x="4860000" y="3933001"/>
             <a:ext cx="288000" cy="324000"/>
           </a:xfrm>
           <a:prstGeom prst="rightArrow">
@@ -7197,7 +6978,7 @@
         </p:nvSpPr>
         <p:spPr>
           <a:xfrm>
-            <a:off x="5220000" y="3727800"/>
+            <a:off x="5220000" y="3663001"/>
             <a:ext cx="1944000" cy="864000"/>
           </a:xfrm>
           <a:prstGeom prst="roundRect">
@@ -7260,7 +7041,7 @@
         </p:nvSpPr>
         <p:spPr>
           <a:xfrm>
-            <a:off x="7236000" y="3997800"/>
+            <a:off x="7236000" y="3933001"/>
             <a:ext cx="288000" cy="324000"/>
           </a:xfrm>
           <a:prstGeom prst="rightArrow">
@@ -7305,7 +7086,7 @@
         </p:nvSpPr>
         <p:spPr>
           <a:xfrm>
-            <a:off x="7596000" y="3727800"/>
+            <a:off x="7596000" y="3663001"/>
             <a:ext cx="1879200" cy="864000"/>
           </a:xfrm>
           <a:prstGeom prst="roundRect">
@@ -7384,7 +7165,7 @@
         </p:nvSpPr>
         <p:spPr>
           <a:xfrm>
-            <a:off x="432000" y="4879800"/>
+            <a:off x="432000" y="4815001"/>
             <a:ext cx="9043200" cy="503999"/>
           </a:xfrm>
           <a:prstGeom prst="roundRect">
@@ -7584,30 +7365,37 @@
         </p:nvSpPr>
         <p:spPr>
           <a:xfrm>
-            <a:off x="432000" y="648000"/>
-            <a:ext cx="9036000" cy="684000"/>
+            <a:off x="432000" y="666000"/>
+            <a:ext cx="9043200" cy="558000"/>
           </a:xfrm>
           <a:prstGeom prst="rect">
             <a:avLst/>
           </a:prstGeom>
-          <a:noFill/>
-        </p:spPr>
-        <p:txBody>
-          <a:bodyPr wrap="square" lIns="0" tIns="21600" rIns="0" bIns="21600" anchor="ctr">
+          <a:solidFill>
+            <a:srgbClr val="F4F7FF"/>
+          </a:solidFill>
+          <a:ln w="12700">
+            <a:solidFill>
+              <a:srgbClr val="D9D9D9"/>
+            </a:solidFill>
+          </a:ln>
+        </p:spPr>
+        <p:txBody>
+          <a:bodyPr wrap="square" lIns="108000" tIns="21600" rIns="108000" bIns="21600" anchor="ctr">
             <a:spAutoFit/>
           </a:bodyPr>
           <a:lstStyle/>
           <a:p>
-            <a:pPr algn="l">
+            <a:pPr algn="ctr">
               <a:lnSpc>
-                <a:spcPct val="130000"/>
+                <a:spcPct val="125000"/>
               </a:lnSpc>
               <a:spcAft>
                 <a:spcPts val="200"/>
               </a:spcAft>
             </a:pPr>
             <a:r>
-              <a:rPr sz="1400" b="1">
+              <a:rPr sz="1300" b="1">
                 <a:solidFill>
                   <a:srgbClr val="1F285A"/>
                 </a:solidFill>
@@ -7619,15 +7407,15 @@
             </a:r>
           </a:p>
           <a:p>
-            <a:pPr algn="l">
+            <a:pPr algn="ctr">
               <a:lnSpc>
-                <a:spcPct val="130000"/>
+                <a:spcPct val="125000"/>
               </a:lnSpc>
             </a:pPr>
             <a:r>
-              <a:rPr sz="1250">
-                <a:solidFill>
-                  <a:srgbClr val="333333"/>
+              <a:rPr sz="1300" b="1">
+                <a:solidFill>
+                  <a:srgbClr val="1F285A"/>
                 </a:solidFill>
                 <a:latin typeface="メイリオ"/>
                 <a:ea typeface="メイリオ"/>
@@ -7638,41 +7426,6 @@
           </a:p>
         </p:txBody>
       </p:sp>
-      <p:cxnSp>
-        <p:nvCxnSpPr>
-          <p:cNvPr id="4" name="Connector 3"/>
-          <p:cNvCxnSpPr/>
-          <p:nvPr/>
-        </p:nvCxnSpPr>
-        <p:spPr>
-          <a:xfrm>
-            <a:off x="0" y="1389600"/>
-            <a:ext cx="9907200" cy="0"/>
-          </a:xfrm>
-          <a:prstGeom prst="line">
-            <a:avLst/>
-          </a:prstGeom>
-          <a:ln w="12700">
-            <a:solidFill>
-              <a:srgbClr val="D9D9D9"/>
-            </a:solidFill>
-          </a:ln>
-        </p:spPr>
-        <p:style>
-          <a:lnRef idx="2">
-            <a:schemeClr val="accent1"/>
-          </a:lnRef>
-          <a:fillRef idx="0">
-            <a:schemeClr val="accent1"/>
-          </a:fillRef>
-          <a:effectRef idx="1">
-            <a:schemeClr val="accent1"/>
-          </a:effectRef>
-          <a:fontRef idx="minor">
-            <a:schemeClr val="tx1"/>
-          </a:fontRef>
-        </p:style>
-      </p:cxnSp>
       <p:sp>
         <p:nvSpPr>
           <p:cNvPr id="5" name="Rounded Rectangle 4"/>
@@ -7681,7 +7434,7 @@
         </p:nvSpPr>
         <p:spPr>
           <a:xfrm>
-            <a:off x="432000" y="2143800"/>
+            <a:off x="432000" y="2079001"/>
             <a:ext cx="864000" cy="864000"/>
           </a:xfrm>
           <a:prstGeom prst="roundRect">
@@ -7742,7 +7495,7 @@
         </p:nvSpPr>
         <p:spPr>
           <a:xfrm>
-            <a:off x="1404000" y="2143800"/>
+            <a:off x="1404000" y="2079001"/>
             <a:ext cx="8071200" cy="864000"/>
           </a:xfrm>
           <a:prstGeom prst="roundRect">
@@ -7824,7 +7577,7 @@
         </p:nvSpPr>
         <p:spPr>
           <a:xfrm>
-            <a:off x="432000" y="3223800"/>
+            <a:off x="432000" y="3159001"/>
             <a:ext cx="864000" cy="864000"/>
           </a:xfrm>
           <a:prstGeom prst="roundRect">
@@ -7885,7 +7638,7 @@
         </p:nvSpPr>
         <p:spPr>
           <a:xfrm>
-            <a:off x="1404000" y="3223800"/>
+            <a:off x="1404000" y="3159001"/>
             <a:ext cx="8071200" cy="864000"/>
           </a:xfrm>
           <a:prstGeom prst="roundRect">
@@ -7967,7 +7720,7 @@
         </p:nvSpPr>
         <p:spPr>
           <a:xfrm>
-            <a:off x="432000" y="4411800"/>
+            <a:off x="432000" y="4347001"/>
             <a:ext cx="1655999" cy="324000"/>
           </a:xfrm>
           <a:prstGeom prst="roundRect">
@@ -8024,7 +7777,7 @@
         </p:nvSpPr>
         <p:spPr>
           <a:xfrm>
-            <a:off x="2160000" y="4411800"/>
+            <a:off x="2160000" y="4347001"/>
             <a:ext cx="1655999" cy="324000"/>
           </a:xfrm>
           <a:prstGeom prst="roundRect">
@@ -8081,7 +7834,7 @@
         </p:nvSpPr>
         <p:spPr>
           <a:xfrm>
-            <a:off x="3960000" y="4411800"/>
+            <a:off x="3960000" y="4347001"/>
             <a:ext cx="5508000" cy="324000"/>
           </a:xfrm>
           <a:prstGeom prst="rect">
@@ -8118,7 +7871,7 @@
         </p:nvSpPr>
         <p:spPr>
           <a:xfrm>
-            <a:off x="432000" y="5023800"/>
+            <a:off x="432000" y="4959001"/>
             <a:ext cx="9043200" cy="503999"/>
           </a:xfrm>
           <a:prstGeom prst="roundRect">

--- a/20260930_サンクスLINEのご提案（簡易版）ver1.1.pptx
+++ b/20260930_サンクスLINEのご提案（簡易版）ver1.1.pptx
@@ -3087,42 +3087,68 @@
         </p:nvSpPr>
         <p:spPr>
           <a:xfrm>
-            <a:off x="432000" y="666000"/>
-            <a:ext cx="9043200" cy="558000"/>
+            <a:off x="432000" y="836230"/>
+            <a:ext cx="9036000" cy="307540"/>
           </a:xfrm>
           <a:prstGeom prst="rect">
             <a:avLst/>
           </a:prstGeom>
-          <a:solidFill>
-            <a:srgbClr val="F4F7FF"/>
-          </a:solidFill>
-          <a:ln w="12700">
-            <a:solidFill>
-              <a:srgbClr val="D9D9D9"/>
-            </a:solidFill>
-          </a:ln>
-        </p:spPr>
-        <p:txBody>
-          <a:bodyPr wrap="square" lIns="108000" tIns="21600" rIns="108000" bIns="21600" anchor="ctr">
+          <a:noFill/>
+        </p:spPr>
+        <p:txBody>
+          <a:bodyPr wrap="square" lIns="0" tIns="21600" rIns="0" bIns="21600" anchor="ctr">
             <a:spAutoFit/>
           </a:bodyPr>
           <a:lstStyle/>
           <a:p>
-            <a:pPr algn="ctr">
+            <a:pPr algn="l">
               <a:lnSpc>
-                <a:spcPct val="125000"/>
+                <a:spcPct val="130000"/>
               </a:lnSpc>
             </a:pPr>
             <a:r>
-              <a:rPr sz="1400" b="1">
-                <a:solidFill>
-                  <a:srgbClr val="1F285A"/>
-                </a:solidFill>
-                <a:latin typeface="メイリオ"/>
-                <a:ea typeface="メイリオ"/>
-                <a:cs typeface="メイリオ"/>
-              </a:rPr>
-              <a:t>LINEで、来店・成約・リピートまで追う</a:t>
+              <a:rPr lang="en-US" altLang="ja-JP" sz="1400" dirty="0">
+                <a:solidFill>
+                  <a:srgbClr val="333333"/>
+                </a:solidFill>
+                <a:latin typeface="メイリオ"/>
+                <a:ea typeface="メイリオ"/>
+                <a:cs typeface="メイリオ"/>
+              </a:rPr>
+              <a:t>LINE</a:t>
+            </a:r>
+            <a:r>
+              <a:rPr lang="ja-JP" altLang="en-US" sz="1400" dirty="0">
+                <a:solidFill>
+                  <a:srgbClr val="333333"/>
+                </a:solidFill>
+                <a:latin typeface="メイリオ"/>
+                <a:ea typeface="メイリオ"/>
+                <a:cs typeface="メイリオ"/>
+              </a:rPr>
+              <a:t>で、</a:t>
+            </a:r>
+            <a:r>
+              <a:rPr sz="1400" dirty="0" err="1">
+                <a:solidFill>
+                  <a:srgbClr val="333333"/>
+                </a:solidFill>
+                <a:latin typeface="メイリオ"/>
+                <a:ea typeface="メイリオ"/>
+                <a:cs typeface="メイリオ"/>
+              </a:rPr>
+              <a:t>来店・成約・リピート</a:t>
+            </a:r>
+            <a:r>
+              <a:rPr lang="ja-JP" altLang="en-US" sz="1400" dirty="0">
+                <a:solidFill>
+                  <a:srgbClr val="333333"/>
+                </a:solidFill>
+                <a:latin typeface="メイリオ"/>
+                <a:ea typeface="メイリオ"/>
+                <a:cs typeface="メイリオ"/>
+              </a:rPr>
+              <a:t>まで追う</a:t>
             </a:r>
             <a:endParaRPr sz="1400" dirty="0">
               <a:solidFill>
@@ -3135,6 +3161,41 @@
           </a:p>
         </p:txBody>
       </p:sp>
+      <p:cxnSp>
+        <p:nvCxnSpPr>
+          <p:cNvPr id="4" name="Connector 3"/>
+          <p:cNvCxnSpPr/>
+          <p:nvPr/>
+        </p:nvCxnSpPr>
+        <p:spPr>
+          <a:xfrm>
+            <a:off x="0" y="1389600"/>
+            <a:ext cx="9907200" cy="0"/>
+          </a:xfrm>
+          <a:prstGeom prst="line">
+            <a:avLst/>
+          </a:prstGeom>
+          <a:ln w="12700">
+            <a:solidFill>
+              <a:srgbClr val="D9D9D9"/>
+            </a:solidFill>
+          </a:ln>
+        </p:spPr>
+        <p:style>
+          <a:lnRef idx="2">
+            <a:schemeClr val="accent1"/>
+          </a:lnRef>
+          <a:fillRef idx="0">
+            <a:schemeClr val="accent1"/>
+          </a:fillRef>
+          <a:effectRef idx="1">
+            <a:schemeClr val="accent1"/>
+          </a:effectRef>
+          <a:fontRef idx="minor">
+            <a:schemeClr val="tx1"/>
+          </a:fontRef>
+        </p:style>
+      </p:cxnSp>
       <p:sp>
         <p:nvSpPr>
           <p:cNvPr id="5" name="Rounded Rectangle 4"/>
@@ -3143,7 +3204,7 @@
         </p:nvSpPr>
         <p:spPr>
           <a:xfrm>
-            <a:off x="432000" y="2259000"/>
+            <a:off x="432000" y="2323800"/>
             <a:ext cx="1872000" cy="1080000"/>
           </a:xfrm>
           <a:prstGeom prst="roundRect">
@@ -3206,7 +3267,7 @@
         </p:nvSpPr>
         <p:spPr>
           <a:xfrm>
-            <a:off x="2412000" y="2637001"/>
+            <a:off x="2412000" y="2701801"/>
             <a:ext cx="324000" cy="324000"/>
           </a:xfrm>
           <a:prstGeom prst="rightArrow">
@@ -3251,7 +3312,7 @@
         </p:nvSpPr>
         <p:spPr>
           <a:xfrm>
-            <a:off x="2844000" y="2259000"/>
+            <a:off x="2844000" y="2323800"/>
             <a:ext cx="1872000" cy="1080000"/>
           </a:xfrm>
           <a:prstGeom prst="roundRect">
@@ -3332,7 +3393,7 @@
         </p:nvSpPr>
         <p:spPr>
           <a:xfrm>
-            <a:off x="4824000" y="2637001"/>
+            <a:off x="4824000" y="2701801"/>
             <a:ext cx="324000" cy="324000"/>
           </a:xfrm>
           <a:prstGeom prst="rightArrow">
@@ -3377,7 +3438,7 @@
         </p:nvSpPr>
         <p:spPr>
           <a:xfrm>
-            <a:off x="7236000" y="2637001"/>
+            <a:off x="7236000" y="2701801"/>
             <a:ext cx="324000" cy="324000"/>
           </a:xfrm>
           <a:prstGeom prst="rightArrow">
@@ -3422,7 +3483,7 @@
         </p:nvSpPr>
         <p:spPr>
           <a:xfrm>
-            <a:off x="432000" y="4779001"/>
+            <a:off x="432000" y="4843801"/>
             <a:ext cx="9043200" cy="503999"/>
           </a:xfrm>
           <a:prstGeom prst="roundRect">
@@ -3483,7 +3544,7 @@
         </p:nvSpPr>
         <p:spPr>
           <a:xfrm>
-            <a:off x="5256000" y="2259000"/>
+            <a:off x="5256000" y="2323800"/>
             <a:ext cx="1872000" cy="1080000"/>
           </a:xfrm>
           <a:prstGeom prst="roundRect">
@@ -3580,7 +3641,7 @@
         </p:nvSpPr>
         <p:spPr>
           <a:xfrm>
-            <a:off x="7668000" y="2259000"/>
+            <a:off x="7668000" y="2323800"/>
             <a:ext cx="1807199" cy="1080000"/>
           </a:xfrm>
           <a:prstGeom prst="roundRect">
@@ -3661,7 +3722,7 @@
         </p:nvSpPr>
         <p:spPr>
           <a:xfrm>
-            <a:off x="432000" y="3465000"/>
+            <a:off x="432000" y="3529800"/>
             <a:ext cx="4284000" cy="306000"/>
           </a:xfrm>
           <a:prstGeom prst="roundRect">
@@ -3718,7 +3779,7 @@
         </p:nvSpPr>
         <p:spPr>
           <a:xfrm>
-            <a:off x="5256000" y="3465000"/>
+            <a:off x="5256000" y="3529800"/>
             <a:ext cx="4219200" cy="306000"/>
           </a:xfrm>
           <a:prstGeom prst="roundRect">
@@ -3775,7 +3836,7 @@
         </p:nvSpPr>
         <p:spPr>
           <a:xfrm>
-            <a:off x="5256000" y="3879000"/>
+            <a:off x="5256000" y="3943800"/>
             <a:ext cx="4219200" cy="396000"/>
           </a:xfrm>
           <a:prstGeom prst="roundRect">
@@ -3905,42 +3966,46 @@
         </p:nvSpPr>
         <p:spPr>
           <a:xfrm>
-            <a:off x="432000" y="666000"/>
-            <a:ext cx="9043200" cy="558000"/>
+            <a:off x="432000" y="696191"/>
+            <a:ext cx="9036000" cy="587617"/>
           </a:xfrm>
           <a:prstGeom prst="rect">
             <a:avLst/>
           </a:prstGeom>
-          <a:solidFill>
-            <a:srgbClr val="F4F7FF"/>
-          </a:solidFill>
-          <a:ln w="12700">
-            <a:solidFill>
-              <a:srgbClr val="D9D9D9"/>
-            </a:solidFill>
-          </a:ln>
-        </p:spPr>
-        <p:txBody>
-          <a:bodyPr wrap="square" lIns="108000" tIns="21600" rIns="108000" bIns="21600" anchor="ctr">
+          <a:noFill/>
+        </p:spPr>
+        <p:txBody>
+          <a:bodyPr wrap="square" lIns="0" tIns="21600" rIns="0" bIns="21600" anchor="ctr">
             <a:spAutoFit/>
           </a:bodyPr>
           <a:lstStyle/>
           <a:p>
-            <a:pPr algn="ctr">
+            <a:pPr algn="l">
               <a:lnSpc>
-                <a:spcPct val="125000"/>
+                <a:spcPct val="130000"/>
               </a:lnSpc>
             </a:pPr>
             <a:r>
-              <a:rPr sz="1300" b="1">
-                <a:solidFill>
-                  <a:srgbClr val="1F285A"/>
-                </a:solidFill>
-                <a:latin typeface="メイリオ"/>
-                <a:ea typeface="メイリオ"/>
-                <a:cs typeface="メイリオ"/>
-              </a:rPr>
-              <a:t>申込みの完了画面から、そのままLINEへ。</a:t>
+              <a:rPr sz="1400" dirty="0" err="1">
+                <a:solidFill>
+                  <a:srgbClr val="333333"/>
+                </a:solidFill>
+                <a:latin typeface="メイリオ"/>
+                <a:ea typeface="メイリオ"/>
+                <a:cs typeface="メイリオ"/>
+              </a:rPr>
+              <a:t>申込みの完了画面から、そのままLINEへ</a:t>
+            </a:r>
+            <a:r>
+              <a:rPr sz="1400" dirty="0">
+                <a:solidFill>
+                  <a:srgbClr val="333333"/>
+                </a:solidFill>
+                <a:latin typeface="メイリオ"/>
+                <a:ea typeface="メイリオ"/>
+                <a:cs typeface="メイリオ"/>
+              </a:rPr>
+              <a:t>。</a:t>
             </a:r>
             <a:endParaRPr lang="en-US" sz="1400" dirty="0">
               <a:solidFill>
@@ -3952,25 +4017,101 @@
             </a:endParaRPr>
           </a:p>
           <a:p>
-            <a:pPr algn="ctr">
+            <a:pPr algn="l">
               <a:lnSpc>
-                <a:spcPct val="125000"/>
+                <a:spcPct val="130000"/>
               </a:lnSpc>
             </a:pPr>
             <a:r>
-              <a:rPr sz="1300" b="1">
-                <a:solidFill>
-                  <a:srgbClr val="1F285A"/>
-                </a:solidFill>
-                <a:latin typeface="メイリオ"/>
-                <a:ea typeface="メイリオ"/>
-                <a:cs typeface="メイリオ"/>
-              </a:rPr>
-              <a:t>関心が一番高いタイミング＝友だちになりやすい</a:t>
-            </a:r>
-          </a:p>
-        </p:txBody>
-      </p:sp>
+              <a:rPr sz="1400" dirty="0" err="1">
+                <a:solidFill>
+                  <a:srgbClr val="333333"/>
+                </a:solidFill>
+                <a:latin typeface="メイリオ"/>
+                <a:ea typeface="メイリオ"/>
+                <a:cs typeface="メイリオ"/>
+              </a:rPr>
+              <a:t>関心が一番高いタイミング</a:t>
+            </a:r>
+            <a:r>
+              <a:rPr lang="ja-JP" altLang="en-US" sz="1400" dirty="0">
+                <a:solidFill>
+                  <a:srgbClr val="333333"/>
+                </a:solidFill>
+                <a:latin typeface="メイリオ"/>
+                <a:ea typeface="メイリオ"/>
+                <a:cs typeface="メイリオ"/>
+              </a:rPr>
+              <a:t>＝</a:t>
+            </a:r>
+            <a:r>
+              <a:rPr sz="1400" dirty="0" err="1">
+                <a:solidFill>
+                  <a:srgbClr val="333333"/>
+                </a:solidFill>
+                <a:latin typeface="メイリオ"/>
+                <a:ea typeface="メイリオ"/>
+                <a:cs typeface="メイリオ"/>
+              </a:rPr>
+              <a:t>友だちに</a:t>
+            </a:r>
+            <a:r>
+              <a:rPr lang="ja-JP" altLang="en-US" sz="1400" dirty="0">
+                <a:solidFill>
+                  <a:srgbClr val="333333"/>
+                </a:solidFill>
+                <a:latin typeface="メイリオ"/>
+                <a:ea typeface="メイリオ"/>
+                <a:cs typeface="メイリオ"/>
+              </a:rPr>
+              <a:t>なりやすい</a:t>
+            </a:r>
+            <a:endParaRPr sz="1400" dirty="0">
+              <a:solidFill>
+                <a:srgbClr val="333333"/>
+              </a:solidFill>
+              <a:latin typeface="メイリオ"/>
+              <a:ea typeface="メイリオ"/>
+              <a:cs typeface="メイリオ"/>
+            </a:endParaRPr>
+          </a:p>
+        </p:txBody>
+      </p:sp>
+      <p:cxnSp>
+        <p:nvCxnSpPr>
+          <p:cNvPr id="4" name="Connector 3"/>
+          <p:cNvCxnSpPr/>
+          <p:nvPr/>
+        </p:nvCxnSpPr>
+        <p:spPr>
+          <a:xfrm>
+            <a:off x="0" y="1389600"/>
+            <a:ext cx="9907200" cy="0"/>
+          </a:xfrm>
+          <a:prstGeom prst="line">
+            <a:avLst/>
+          </a:prstGeom>
+          <a:ln w="12700">
+            <a:solidFill>
+              <a:srgbClr val="D9D9D9"/>
+            </a:solidFill>
+          </a:ln>
+        </p:spPr>
+        <p:style>
+          <a:lnRef idx="2">
+            <a:schemeClr val="accent1"/>
+          </a:lnRef>
+          <a:fillRef idx="0">
+            <a:schemeClr val="accent1"/>
+          </a:fillRef>
+          <a:effectRef idx="1">
+            <a:schemeClr val="accent1"/>
+          </a:effectRef>
+          <a:fontRef idx="minor">
+            <a:schemeClr val="tx1"/>
+          </a:fontRef>
+        </p:style>
+      </p:cxnSp>
       <p:sp>
         <p:nvSpPr>
           <p:cNvPr id="5" name="Rounded Rectangle 4"/>
@@ -3979,7 +4120,7 @@
         </p:nvSpPr>
         <p:spPr>
           <a:xfrm>
-            <a:off x="432000" y="2349900"/>
+            <a:off x="432000" y="2485800"/>
             <a:ext cx="1584000" cy="936000"/>
           </a:xfrm>
           <a:prstGeom prst="roundRect">
@@ -4042,7 +4183,7 @@
         </p:nvSpPr>
         <p:spPr>
           <a:xfrm>
-            <a:off x="2088000" y="2655900"/>
+            <a:off x="2088000" y="2791800"/>
             <a:ext cx="288000" cy="324000"/>
           </a:xfrm>
           <a:prstGeom prst="rightArrow">
@@ -4087,7 +4228,7 @@
         </p:nvSpPr>
         <p:spPr>
           <a:xfrm>
-            <a:off x="2448000" y="2349900"/>
+            <a:off x="2448000" y="2485800"/>
             <a:ext cx="1764000" cy="936000"/>
           </a:xfrm>
           <a:prstGeom prst="roundRect">
@@ -4168,7 +4309,7 @@
         </p:nvSpPr>
         <p:spPr>
           <a:xfrm>
-            <a:off x="4284000" y="2655900"/>
+            <a:off x="4284000" y="2791800"/>
             <a:ext cx="288000" cy="324000"/>
           </a:xfrm>
           <a:prstGeom prst="rightArrow">
@@ -4213,7 +4354,7 @@
         </p:nvSpPr>
         <p:spPr>
           <a:xfrm>
-            <a:off x="4644000" y="2349900"/>
+            <a:off x="4644000" y="2485800"/>
             <a:ext cx="1296000" cy="936000"/>
           </a:xfrm>
           <a:prstGeom prst="roundRect">
@@ -4308,7 +4449,7 @@
         </p:nvSpPr>
         <p:spPr>
           <a:xfrm>
-            <a:off x="6012000" y="2655900"/>
+            <a:off x="6012000" y="2791800"/>
             <a:ext cx="288000" cy="324000"/>
           </a:xfrm>
           <a:prstGeom prst="rightArrow">
@@ -4353,7 +4494,7 @@
         </p:nvSpPr>
         <p:spPr>
           <a:xfrm>
-            <a:off x="6372000" y="2349900"/>
+            <a:off x="6372000" y="2485800"/>
             <a:ext cx="3103199" cy="432000"/>
           </a:xfrm>
           <a:prstGeom prst="roundRect">
@@ -4416,7 +4557,7 @@
         </p:nvSpPr>
         <p:spPr>
           <a:xfrm>
-            <a:off x="6372000" y="2853901"/>
+            <a:off x="6372000" y="2989801"/>
             <a:ext cx="3103199" cy="432000"/>
           </a:xfrm>
           <a:prstGeom prst="roundRect">
@@ -4479,7 +4620,7 @@
         </p:nvSpPr>
         <p:spPr>
           <a:xfrm>
-            <a:off x="432000" y="3573901"/>
+            <a:off x="432000" y="3709801"/>
             <a:ext cx="2951999" cy="936000"/>
           </a:xfrm>
           <a:prstGeom prst="roundRect">
@@ -4588,7 +4729,7 @@
         </p:nvSpPr>
         <p:spPr>
           <a:xfrm>
-            <a:off x="3477599" y="3573901"/>
+            <a:off x="3477599" y="3709801"/>
             <a:ext cx="2951999" cy="936000"/>
           </a:xfrm>
           <a:prstGeom prst="roundRect">
@@ -4737,7 +4878,7 @@
         </p:nvSpPr>
         <p:spPr>
           <a:xfrm>
-            <a:off x="6523199" y="3573901"/>
+            <a:off x="6523199" y="3709801"/>
             <a:ext cx="2951999" cy="936000"/>
           </a:xfrm>
           <a:prstGeom prst="roundRect">
@@ -4846,7 +4987,7 @@
         </p:nvSpPr>
         <p:spPr>
           <a:xfrm>
-            <a:off x="1425600" y="4760100"/>
+            <a:off x="1425600" y="4896000"/>
             <a:ext cx="7056000" cy="432000"/>
           </a:xfrm>
           <a:prstGeom prst="roundRect">
@@ -4894,7 +5035,7 @@
         </p:nvSpPr>
         <p:spPr>
           <a:xfrm>
-            <a:off x="1533600" y="4850100"/>
+            <a:off x="1533600" y="4986000"/>
             <a:ext cx="648000" cy="251999"/>
           </a:xfrm>
           <a:prstGeom prst="roundRect">
@@ -4951,7 +5092,7 @@
         </p:nvSpPr>
         <p:spPr>
           <a:xfrm>
-            <a:off x="2253600" y="4760100"/>
+            <a:off x="2253600" y="4896000"/>
             <a:ext cx="2520000" cy="432000"/>
           </a:xfrm>
           <a:prstGeom prst="rect">
@@ -5021,7 +5162,7 @@
         </p:nvCxnSpPr>
         <p:spPr>
           <a:xfrm>
-            <a:off x="4845600" y="4850100"/>
+            <a:off x="4845600" y="4986000"/>
             <a:ext cx="0" cy="252000"/>
           </a:xfrm>
           <a:prstGeom prst="line">
@@ -5056,7 +5197,7 @@
         </p:nvSpPr>
         <p:spPr>
           <a:xfrm>
-            <a:off x="4953600" y="4760100"/>
+            <a:off x="4953600" y="4896000"/>
             <a:ext cx="3491999" cy="432000"/>
           </a:xfrm>
           <a:prstGeom prst="rect">
@@ -5178,42 +5319,46 @@
         </p:nvSpPr>
         <p:spPr>
           <a:xfrm>
-            <a:off x="432000" y="666000"/>
-            <a:ext cx="9043200" cy="558000"/>
+            <a:off x="432000" y="836230"/>
+            <a:ext cx="9036000" cy="307540"/>
           </a:xfrm>
           <a:prstGeom prst="rect">
             <a:avLst/>
           </a:prstGeom>
-          <a:solidFill>
-            <a:srgbClr val="F4F7FF"/>
-          </a:solidFill>
-          <a:ln w="12700">
-            <a:solidFill>
-              <a:srgbClr val="D9D9D9"/>
-            </a:solidFill>
-          </a:ln>
-        </p:spPr>
-        <p:txBody>
-          <a:bodyPr wrap="square" lIns="108000" tIns="21600" rIns="108000" bIns="21600" anchor="ctr">
+          <a:noFill/>
+        </p:spPr>
+        <p:txBody>
+          <a:bodyPr wrap="square" lIns="0" tIns="21600" rIns="0" bIns="21600" anchor="ctr">
             <a:spAutoFit/>
           </a:bodyPr>
           <a:lstStyle/>
           <a:p>
-            <a:pPr algn="ctr">
+            <a:pPr algn="l">
               <a:lnSpc>
-                <a:spcPct val="125000"/>
+                <a:spcPct val="130000"/>
               </a:lnSpc>
             </a:pPr>
             <a:r>
-              <a:rPr sz="1400" b="1">
-                <a:solidFill>
-                  <a:srgbClr val="1F285A"/>
-                </a:solidFill>
-                <a:latin typeface="メイリオ"/>
-                <a:ea typeface="メイリオ"/>
-                <a:cs typeface="メイリオ"/>
-              </a:rPr>
-              <a:t>申込んだ方に合わせて、LINEで次の一歩へとつなげる</a:t>
+              <a:rPr sz="1400" dirty="0" err="1">
+                <a:solidFill>
+                  <a:srgbClr val="333333"/>
+                </a:solidFill>
+                <a:latin typeface="メイリオ"/>
+                <a:ea typeface="メイリオ"/>
+                <a:cs typeface="メイリオ"/>
+              </a:rPr>
+              <a:t>申込んだ方に合わせて、LINEで次の一歩</a:t>
+            </a:r>
+            <a:r>
+              <a:rPr lang="ja-JP" altLang="en-US" sz="1400" dirty="0">
+                <a:solidFill>
+                  <a:srgbClr val="333333"/>
+                </a:solidFill>
+                <a:latin typeface="メイリオ"/>
+                <a:ea typeface="メイリオ"/>
+                <a:cs typeface="メイリオ"/>
+              </a:rPr>
+              <a:t>へとつなげる</a:t>
             </a:r>
             <a:endParaRPr sz="1400" dirty="0">
               <a:solidFill>
@@ -5226,6 +5371,41 @@
           </a:p>
         </p:txBody>
       </p:sp>
+      <p:cxnSp>
+        <p:nvCxnSpPr>
+          <p:cNvPr id="4" name="Connector 3"/>
+          <p:cNvCxnSpPr/>
+          <p:nvPr/>
+        </p:nvCxnSpPr>
+        <p:spPr>
+          <a:xfrm>
+            <a:off x="0" y="1389600"/>
+            <a:ext cx="9907200" cy="0"/>
+          </a:xfrm>
+          <a:prstGeom prst="line">
+            <a:avLst/>
+          </a:prstGeom>
+          <a:ln w="12700">
+            <a:solidFill>
+              <a:srgbClr val="D9D9D9"/>
+            </a:solidFill>
+          </a:ln>
+        </p:spPr>
+        <p:style>
+          <a:lnRef idx="2">
+            <a:schemeClr val="accent1"/>
+          </a:lnRef>
+          <a:fillRef idx="0">
+            <a:schemeClr val="accent1"/>
+          </a:fillRef>
+          <a:effectRef idx="1">
+            <a:schemeClr val="accent1"/>
+          </a:effectRef>
+          <a:fontRef idx="minor">
+            <a:schemeClr val="tx1"/>
+          </a:fontRef>
+        </p:style>
+      </p:cxnSp>
       <p:sp>
         <p:nvSpPr>
           <p:cNvPr id="5" name="Rounded Rectangle 4"/>
@@ -5234,7 +5414,7 @@
         </p:nvSpPr>
         <p:spPr>
           <a:xfrm>
-            <a:off x="432000" y="2151000"/>
+            <a:off x="432000" y="2215800"/>
             <a:ext cx="2951999" cy="503999"/>
           </a:xfrm>
           <a:prstGeom prst="roundRect">
@@ -5295,7 +5475,7 @@
         </p:nvSpPr>
         <p:spPr>
           <a:xfrm>
-            <a:off x="1692000" y="2709001"/>
+            <a:off x="1692000" y="2773801"/>
             <a:ext cx="432000" cy="251999"/>
           </a:xfrm>
           <a:prstGeom prst="downArrow">
@@ -5340,7 +5520,7 @@
         </p:nvSpPr>
         <p:spPr>
           <a:xfrm>
-            <a:off x="432000" y="3015001"/>
+            <a:off x="432000" y="3079801"/>
             <a:ext cx="2951999" cy="648000"/>
           </a:xfrm>
           <a:prstGeom prst="roundRect">
@@ -5403,7 +5583,7 @@
         </p:nvSpPr>
         <p:spPr>
           <a:xfrm>
-            <a:off x="1692000" y="3717000"/>
+            <a:off x="1692000" y="3781800"/>
             <a:ext cx="432000" cy="251999"/>
           </a:xfrm>
           <a:prstGeom prst="downArrow">
@@ -5448,7 +5628,7 @@
         </p:nvSpPr>
         <p:spPr>
           <a:xfrm>
-            <a:off x="432000" y="4023001"/>
+            <a:off x="432000" y="4087801"/>
             <a:ext cx="2951999" cy="503999"/>
           </a:xfrm>
           <a:prstGeom prst="roundRect">
@@ -5509,7 +5689,7 @@
         </p:nvSpPr>
         <p:spPr>
           <a:xfrm>
-            <a:off x="3477599" y="2151000"/>
+            <a:off x="3477599" y="2215800"/>
             <a:ext cx="2951999" cy="503999"/>
           </a:xfrm>
           <a:prstGeom prst="roundRect">
@@ -5570,7 +5750,7 @@
         </p:nvSpPr>
         <p:spPr>
           <a:xfrm>
-            <a:off x="4737599" y="2709001"/>
+            <a:off x="4737599" y="2773801"/>
             <a:ext cx="432000" cy="251999"/>
           </a:xfrm>
           <a:prstGeom prst="downArrow">
@@ -5615,7 +5795,7 @@
         </p:nvSpPr>
         <p:spPr>
           <a:xfrm>
-            <a:off x="3477599" y="3015001"/>
+            <a:off x="3477599" y="3079801"/>
             <a:ext cx="2951999" cy="648000"/>
           </a:xfrm>
           <a:prstGeom prst="roundRect">
@@ -5678,7 +5858,7 @@
         </p:nvSpPr>
         <p:spPr>
           <a:xfrm>
-            <a:off x="4737599" y="3717000"/>
+            <a:off x="4737599" y="3781800"/>
             <a:ext cx="432000" cy="251999"/>
           </a:xfrm>
           <a:prstGeom prst="downArrow">
@@ -5723,7 +5903,7 @@
         </p:nvSpPr>
         <p:spPr>
           <a:xfrm>
-            <a:off x="3477599" y="4023001"/>
+            <a:off x="3477599" y="4087801"/>
             <a:ext cx="2951999" cy="503999"/>
           </a:xfrm>
           <a:prstGeom prst="roundRect">
@@ -5784,7 +5964,7 @@
         </p:nvSpPr>
         <p:spPr>
           <a:xfrm>
-            <a:off x="6523199" y="2151000"/>
+            <a:off x="6523199" y="2215800"/>
             <a:ext cx="2951999" cy="503999"/>
           </a:xfrm>
           <a:prstGeom prst="roundRect">
@@ -5845,7 +6025,7 @@
         </p:nvSpPr>
         <p:spPr>
           <a:xfrm>
-            <a:off x="7783199" y="2709001"/>
+            <a:off x="7783199" y="2773801"/>
             <a:ext cx="432000" cy="251999"/>
           </a:xfrm>
           <a:prstGeom prst="downArrow">
@@ -5890,7 +6070,7 @@
         </p:nvSpPr>
         <p:spPr>
           <a:xfrm>
-            <a:off x="6523199" y="3015001"/>
+            <a:off x="6523199" y="3079801"/>
             <a:ext cx="2951999" cy="648000"/>
           </a:xfrm>
           <a:prstGeom prst="roundRect">
@@ -5953,7 +6133,7 @@
         </p:nvSpPr>
         <p:spPr>
           <a:xfrm>
-            <a:off x="7783199" y="3717000"/>
+            <a:off x="7783199" y="3781800"/>
             <a:ext cx="432000" cy="251999"/>
           </a:xfrm>
           <a:prstGeom prst="downArrow">
@@ -5998,7 +6178,7 @@
         </p:nvSpPr>
         <p:spPr>
           <a:xfrm>
-            <a:off x="6523199" y="4023001"/>
+            <a:off x="6523199" y="4087801"/>
             <a:ext cx="2951999" cy="503999"/>
           </a:xfrm>
           <a:prstGeom prst="roundRect">
@@ -6100,7 +6280,7 @@
         </p:nvSpPr>
         <p:spPr>
           <a:xfrm>
-            <a:off x="432000" y="4887001"/>
+            <a:off x="432000" y="4951801"/>
             <a:ext cx="9043200" cy="503999"/>
           </a:xfrm>
           <a:prstGeom prst="roundRect">
@@ -6228,42 +6408,46 @@
         </p:nvSpPr>
         <p:spPr>
           <a:xfrm>
-            <a:off x="432000" y="666000"/>
-            <a:ext cx="9043200" cy="558000"/>
+            <a:off x="432000" y="836230"/>
+            <a:ext cx="9036000" cy="307540"/>
           </a:xfrm>
           <a:prstGeom prst="rect">
             <a:avLst/>
           </a:prstGeom>
-          <a:solidFill>
-            <a:srgbClr val="F4F7FF"/>
-          </a:solidFill>
-          <a:ln w="12700">
-            <a:solidFill>
-              <a:srgbClr val="D9D9D9"/>
-            </a:solidFill>
-          </a:ln>
-        </p:spPr>
-        <p:txBody>
-          <a:bodyPr wrap="square" lIns="108000" tIns="21600" rIns="108000" bIns="21600" anchor="ctr">
+          <a:noFill/>
+        </p:spPr>
+        <p:txBody>
+          <a:bodyPr wrap="square" lIns="0" tIns="21600" rIns="0" bIns="21600" anchor="ctr">
             <a:spAutoFit/>
           </a:bodyPr>
           <a:lstStyle/>
           <a:p>
-            <a:pPr algn="ctr">
+            <a:pPr algn="l">
               <a:lnSpc>
-                <a:spcPct val="125000"/>
+                <a:spcPct val="130000"/>
               </a:lnSpc>
             </a:pPr>
             <a:r>
-              <a:rPr sz="1400" b="1">
-                <a:solidFill>
-                  <a:srgbClr val="1F285A"/>
-                </a:solidFill>
-                <a:latin typeface="メイリオ"/>
-                <a:ea typeface="メイリオ"/>
-                <a:cs typeface="メイリオ"/>
-              </a:rPr>
-              <a:t>同じ広告費のまま、申込みの「後」を伸ばして成約数増加へ</a:t>
+              <a:rPr sz="1400" dirty="0" err="1">
+                <a:solidFill>
+                  <a:srgbClr val="333333"/>
+                </a:solidFill>
+                <a:latin typeface="メイリオ"/>
+                <a:ea typeface="メイリオ"/>
+                <a:cs typeface="メイリオ"/>
+              </a:rPr>
+              <a:t>同じ広告費のまま、申込みの「後」を伸ばして成約</a:t>
+            </a:r>
+            <a:r>
+              <a:rPr lang="ja-JP" altLang="en-US" sz="1400" dirty="0">
+                <a:solidFill>
+                  <a:srgbClr val="333333"/>
+                </a:solidFill>
+                <a:latin typeface="メイリオ"/>
+                <a:ea typeface="メイリオ"/>
+                <a:cs typeface="メイリオ"/>
+              </a:rPr>
+              <a:t>数増加へ</a:t>
             </a:r>
             <a:endParaRPr sz="1400" dirty="0">
               <a:solidFill>
@@ -6276,6 +6460,41 @@
           </a:p>
         </p:txBody>
       </p:sp>
+      <p:cxnSp>
+        <p:nvCxnSpPr>
+          <p:cNvPr id="4" name="Connector 3"/>
+          <p:cNvCxnSpPr/>
+          <p:nvPr/>
+        </p:nvCxnSpPr>
+        <p:spPr>
+          <a:xfrm>
+            <a:off x="0" y="1389600"/>
+            <a:ext cx="9907200" cy="0"/>
+          </a:xfrm>
+          <a:prstGeom prst="line">
+            <a:avLst/>
+          </a:prstGeom>
+          <a:ln w="12700">
+            <a:solidFill>
+              <a:srgbClr val="D9D9D9"/>
+            </a:solidFill>
+          </a:ln>
+        </p:spPr>
+        <p:style>
+          <a:lnRef idx="2">
+            <a:schemeClr val="accent1"/>
+          </a:lnRef>
+          <a:fillRef idx="0">
+            <a:schemeClr val="accent1"/>
+          </a:fillRef>
+          <a:effectRef idx="1">
+            <a:schemeClr val="accent1"/>
+          </a:effectRef>
+          <a:fontRef idx="minor">
+            <a:schemeClr val="tx1"/>
+          </a:fontRef>
+        </p:style>
+      </p:cxnSp>
       <p:sp>
         <p:nvSpPr>
           <p:cNvPr id="5" name="Rounded Rectangle 4"/>
@@ -6284,7 +6503,7 @@
         </p:nvSpPr>
         <p:spPr>
           <a:xfrm>
-            <a:off x="1584000" y="2223001"/>
+            <a:off x="1584000" y="2287800"/>
             <a:ext cx="3204000" cy="270000"/>
           </a:xfrm>
           <a:prstGeom prst="roundRect">
@@ -6341,7 +6560,7 @@
         </p:nvSpPr>
         <p:spPr>
           <a:xfrm>
-            <a:off x="4896000" y="2223001"/>
+            <a:off x="4896000" y="2287800"/>
             <a:ext cx="4579200" cy="270000"/>
           </a:xfrm>
           <a:prstGeom prst="roundRect">
@@ -6398,7 +6617,7 @@
         </p:nvSpPr>
         <p:spPr>
           <a:xfrm>
-            <a:off x="432000" y="2619001"/>
+            <a:off x="432000" y="2683800"/>
             <a:ext cx="1044000" cy="864000"/>
           </a:xfrm>
           <a:prstGeom prst="roundRect">
@@ -6459,7 +6678,7 @@
         </p:nvSpPr>
         <p:spPr>
           <a:xfrm>
-            <a:off x="1584000" y="2619001"/>
+            <a:off x="1584000" y="2683800"/>
             <a:ext cx="3204000" cy="864000"/>
           </a:xfrm>
           <a:prstGeom prst="roundRect">
@@ -6540,7 +6759,7 @@
         </p:nvSpPr>
         <p:spPr>
           <a:xfrm>
-            <a:off x="4860000" y="2889001"/>
+            <a:off x="4860000" y="2953800"/>
             <a:ext cx="288000" cy="324000"/>
           </a:xfrm>
           <a:prstGeom prst="rightArrow">
@@ -6585,7 +6804,7 @@
         </p:nvSpPr>
         <p:spPr>
           <a:xfrm>
-            <a:off x="5220000" y="2619001"/>
+            <a:off x="5220000" y="2683800"/>
             <a:ext cx="1944000" cy="864000"/>
           </a:xfrm>
           <a:prstGeom prst="roundRect">
@@ -6649,7 +6868,7 @@
         </p:nvSpPr>
         <p:spPr>
           <a:xfrm>
-            <a:off x="7236000" y="2889001"/>
+            <a:off x="7236000" y="2953800"/>
             <a:ext cx="288000" cy="324000"/>
           </a:xfrm>
           <a:prstGeom prst="rightArrow">
@@ -6694,7 +6913,7 @@
         </p:nvSpPr>
         <p:spPr>
           <a:xfrm>
-            <a:off x="7596000" y="2619001"/>
+            <a:off x="7596000" y="2683800"/>
             <a:ext cx="1879200" cy="864000"/>
           </a:xfrm>
           <a:prstGeom prst="roundRect">
@@ -6773,7 +6992,7 @@
         </p:nvSpPr>
         <p:spPr>
           <a:xfrm>
-            <a:off x="432000" y="3663001"/>
+            <a:off x="432000" y="3727800"/>
             <a:ext cx="1044000" cy="864000"/>
           </a:xfrm>
           <a:prstGeom prst="roundRect">
@@ -6852,7 +7071,7 @@
         </p:nvSpPr>
         <p:spPr>
           <a:xfrm>
-            <a:off x="1584000" y="3663001"/>
+            <a:off x="1584000" y="3727800"/>
             <a:ext cx="3204000" cy="864000"/>
           </a:xfrm>
           <a:prstGeom prst="roundRect">
@@ -6933,7 +7152,7 @@
         </p:nvSpPr>
         <p:spPr>
           <a:xfrm>
-            <a:off x="4860000" y="3933001"/>
+            <a:off x="4860000" y="3997800"/>
             <a:ext cx="288000" cy="324000"/>
           </a:xfrm>
           <a:prstGeom prst="rightArrow">
@@ -6978,7 +7197,7 @@
         </p:nvSpPr>
         <p:spPr>
           <a:xfrm>
-            <a:off x="5220000" y="3663001"/>
+            <a:off x="5220000" y="3727800"/>
             <a:ext cx="1944000" cy="864000"/>
           </a:xfrm>
           <a:prstGeom prst="roundRect">
@@ -7041,7 +7260,7 @@
         </p:nvSpPr>
         <p:spPr>
           <a:xfrm>
-            <a:off x="7236000" y="3933001"/>
+            <a:off x="7236000" y="3997800"/>
             <a:ext cx="288000" cy="324000"/>
           </a:xfrm>
           <a:prstGeom prst="rightArrow">
@@ -7086,7 +7305,7 @@
         </p:nvSpPr>
         <p:spPr>
           <a:xfrm>
-            <a:off x="7596000" y="3663001"/>
+            <a:off x="7596000" y="3727800"/>
             <a:ext cx="1879200" cy="864000"/>
           </a:xfrm>
           <a:prstGeom prst="roundRect">
@@ -7165,7 +7384,7 @@
         </p:nvSpPr>
         <p:spPr>
           <a:xfrm>
-            <a:off x="432000" y="4815001"/>
+            <a:off x="432000" y="4879800"/>
             <a:ext cx="9043200" cy="503999"/>
           </a:xfrm>
           <a:prstGeom prst="roundRect">
@@ -7365,67 +7584,95 @@
         </p:nvSpPr>
         <p:spPr>
           <a:xfrm>
-            <a:off x="432000" y="666000"/>
-            <a:ext cx="9043200" cy="558000"/>
+            <a:off x="432000" y="648000"/>
+            <a:ext cx="9036000" cy="684000"/>
           </a:xfrm>
           <a:prstGeom prst="rect">
             <a:avLst/>
           </a:prstGeom>
-          <a:solidFill>
-            <a:srgbClr val="F4F7FF"/>
-          </a:solidFill>
+          <a:noFill/>
+        </p:spPr>
+        <p:txBody>
+          <a:bodyPr wrap="square" lIns="0" tIns="21600" rIns="0" bIns="21600" anchor="ctr">
+            <a:spAutoFit/>
+          </a:bodyPr>
+          <a:lstStyle/>
+          <a:p>
+            <a:pPr algn="l">
+              <a:lnSpc>
+                <a:spcPct val="130000"/>
+              </a:lnSpc>
+              <a:spcAft>
+                <a:spcPts val="200"/>
+              </a:spcAft>
+            </a:pPr>
+            <a:r>
+              <a:rPr sz="1400" b="1">
+                <a:solidFill>
+                  <a:srgbClr val="1F285A"/>
+                </a:solidFill>
+                <a:latin typeface="メイリオ"/>
+                <a:ea typeface="メイリオ"/>
+                <a:cs typeface="メイリオ"/>
+              </a:rPr>
+              <a:t>広告の予算に、月3万円〜を足すだけ。</a:t>
+            </a:r>
+          </a:p>
+          <a:p>
+            <a:pPr algn="l">
+              <a:lnSpc>
+                <a:spcPct val="130000"/>
+              </a:lnSpc>
+            </a:pPr>
+            <a:r>
+              <a:rPr sz="1250">
+                <a:solidFill>
+                  <a:srgbClr val="333333"/>
+                </a:solidFill>
+                <a:latin typeface="メイリオ"/>
+                <a:ea typeface="メイリオ"/>
+                <a:cs typeface="メイリオ"/>
+              </a:rPr>
+              <a:t>完了画面にLINEへの案内を置けば、広告で集めた申込みを売上までつなげる仕組みが、広告と同時に始められます。</a:t>
+            </a:r>
+          </a:p>
+        </p:txBody>
+      </p:sp>
+      <p:cxnSp>
+        <p:nvCxnSpPr>
+          <p:cNvPr id="4" name="Connector 3"/>
+          <p:cNvCxnSpPr/>
+          <p:nvPr/>
+        </p:nvCxnSpPr>
+        <p:spPr>
+          <a:xfrm>
+            <a:off x="0" y="1389600"/>
+            <a:ext cx="9907200" cy="0"/>
+          </a:xfrm>
+          <a:prstGeom prst="line">
+            <a:avLst/>
+          </a:prstGeom>
           <a:ln w="12700">
             <a:solidFill>
               <a:srgbClr val="D9D9D9"/>
             </a:solidFill>
           </a:ln>
         </p:spPr>
-        <p:txBody>
-          <a:bodyPr wrap="square" lIns="108000" tIns="21600" rIns="108000" bIns="21600" anchor="ctr">
-            <a:spAutoFit/>
-          </a:bodyPr>
-          <a:lstStyle/>
-          <a:p>
-            <a:pPr algn="ctr">
-              <a:lnSpc>
-                <a:spcPct val="125000"/>
-              </a:lnSpc>
-              <a:spcAft>
-                <a:spcPts val="200"/>
-              </a:spcAft>
-            </a:pPr>
-            <a:r>
-              <a:rPr sz="1300" b="1">
-                <a:solidFill>
-                  <a:srgbClr val="1F285A"/>
-                </a:solidFill>
-                <a:latin typeface="メイリオ"/>
-                <a:ea typeface="メイリオ"/>
-                <a:cs typeface="メイリオ"/>
-              </a:rPr>
-              <a:t>広告の予算に、月3万円〜を足すだけ。</a:t>
-            </a:r>
-          </a:p>
-          <a:p>
-            <a:pPr algn="ctr">
-              <a:lnSpc>
-                <a:spcPct val="125000"/>
-              </a:lnSpc>
-            </a:pPr>
-            <a:r>
-              <a:rPr sz="1300" b="1">
-                <a:solidFill>
-                  <a:srgbClr val="1F285A"/>
-                </a:solidFill>
-                <a:latin typeface="メイリオ"/>
-                <a:ea typeface="メイリオ"/>
-                <a:cs typeface="メイリオ"/>
-              </a:rPr>
-              <a:t>完了画面にLINEへの案内を置けば、広告で集めた申込みを売上までつなげる仕組みが、広告と同時に始められます。</a:t>
-            </a:r>
-          </a:p>
-        </p:txBody>
-      </p:sp>
+        <p:style>
+          <a:lnRef idx="2">
+            <a:schemeClr val="accent1"/>
+          </a:lnRef>
+          <a:fillRef idx="0">
+            <a:schemeClr val="accent1"/>
+          </a:fillRef>
+          <a:effectRef idx="1">
+            <a:schemeClr val="accent1"/>
+          </a:effectRef>
+          <a:fontRef idx="minor">
+            <a:schemeClr val="tx1"/>
+          </a:fontRef>
+        </p:style>
+      </p:cxnSp>
       <p:sp>
         <p:nvSpPr>
           <p:cNvPr id="5" name="Rounded Rectangle 4"/>
@@ -7434,7 +7681,7 @@
         </p:nvSpPr>
         <p:spPr>
           <a:xfrm>
-            <a:off x="432000" y="2079001"/>
+            <a:off x="432000" y="2143800"/>
             <a:ext cx="864000" cy="864000"/>
           </a:xfrm>
           <a:prstGeom prst="roundRect">
@@ -7495,7 +7742,7 @@
         </p:nvSpPr>
         <p:spPr>
           <a:xfrm>
-            <a:off x="1404000" y="2079001"/>
+            <a:off x="1404000" y="2143800"/>
             <a:ext cx="8071200" cy="864000"/>
           </a:xfrm>
           <a:prstGeom prst="roundRect">
@@ -7577,7 +7824,7 @@
         </p:nvSpPr>
         <p:spPr>
           <a:xfrm>
-            <a:off x="432000" y="3159001"/>
+            <a:off x="432000" y="3223800"/>
             <a:ext cx="864000" cy="864000"/>
           </a:xfrm>
           <a:prstGeom prst="roundRect">
@@ -7638,7 +7885,7 @@
         </p:nvSpPr>
         <p:spPr>
           <a:xfrm>
-            <a:off x="1404000" y="3159001"/>
+            <a:off x="1404000" y="3223800"/>
             <a:ext cx="8071200" cy="864000"/>
           </a:xfrm>
           <a:prstGeom prst="roundRect">
@@ -7720,7 +7967,7 @@
         </p:nvSpPr>
         <p:spPr>
           <a:xfrm>
-            <a:off x="432000" y="4347001"/>
+            <a:off x="432000" y="4411800"/>
             <a:ext cx="1655999" cy="324000"/>
           </a:xfrm>
           <a:prstGeom prst="roundRect">
@@ -7777,7 +8024,7 @@
         </p:nvSpPr>
         <p:spPr>
           <a:xfrm>
-            <a:off x="2160000" y="4347001"/>
+            <a:off x="2160000" y="4411800"/>
             <a:ext cx="1655999" cy="324000"/>
           </a:xfrm>
           <a:prstGeom prst="roundRect">
@@ -7834,7 +8081,7 @@
         </p:nvSpPr>
         <p:spPr>
           <a:xfrm>
-            <a:off x="3960000" y="4347001"/>
+            <a:off x="3960000" y="4411800"/>
             <a:ext cx="5508000" cy="324000"/>
           </a:xfrm>
           <a:prstGeom prst="rect">
@@ -7871,7 +8118,7 @@
         </p:nvSpPr>
         <p:spPr>
           <a:xfrm>
-            <a:off x="432000" y="4959001"/>
+            <a:off x="432000" y="5023800"/>
             <a:ext cx="9043200" cy="503999"/>
           </a:xfrm>
           <a:prstGeom prst="roundRect">

--- a/20260930_サンクスLINEのご提案（簡易版）ver1.1.pptx
+++ b/20260930_サンクスLINEのご提案（簡易版）ver1.1.pptx
@@ -3024,58 +3024,6 @@
               </a:rPr>
               <a:t>LINEは、申込みの「後」につながる</a:t>
             </a:r>
-            <a:r>
-              <a:rPr lang="ja-JP" altLang="en-US" sz="1600" b="1" dirty="0">
-                <a:solidFill>
-                  <a:srgbClr val="002060"/>
-                </a:solidFill>
-                <a:latin typeface="メイリオ"/>
-                <a:ea typeface="メイリオ"/>
-                <a:cs typeface="メイリオ"/>
-              </a:rPr>
-              <a:t/>
-            </a:r>
-            <a:r>
-              <a:rPr sz="1600" b="1" dirty="0" err="1">
-                <a:solidFill>
-                  <a:srgbClr val="002060"/>
-                </a:solidFill>
-                <a:latin typeface="メイリオ"/>
-                <a:ea typeface="メイリオ"/>
-                <a:cs typeface="メイリオ"/>
-              </a:rPr>
-              <a:t/>
-            </a:r>
-            <a:r>
-              <a:rPr sz="1600" b="1" dirty="0">
-                <a:solidFill>
-                  <a:srgbClr val="002060"/>
-                </a:solidFill>
-                <a:latin typeface="メイリオ"/>
-                <a:ea typeface="メイリオ"/>
-                <a:cs typeface="メイリオ"/>
-              </a:rPr>
-              <a:t/>
-            </a:r>
-            <a:r>
-              <a:rPr lang="ja-JP" altLang="en-US" sz="1600" b="1" dirty="0">
-                <a:solidFill>
-                  <a:srgbClr val="002060"/>
-                </a:solidFill>
-                <a:latin typeface="メイリオ"/>
-                <a:ea typeface="メイリオ"/>
-                <a:cs typeface="メイリオ"/>
-              </a:rPr>
-              <a:t/>
-            </a:r>
-            <a:endParaRPr sz="1600" b="1" dirty="0">
-              <a:solidFill>
-                <a:srgbClr val="002060"/>
-              </a:solidFill>
-              <a:latin typeface="メイリオ"/>
-              <a:ea typeface="メイリオ"/>
-              <a:cs typeface="メイリオ"/>
-            </a:endParaRPr>
           </a:p>
         </p:txBody>
       </p:sp>
@@ -3087,8 +3035,8 @@
         </p:nvSpPr>
         <p:spPr>
           <a:xfrm>
-            <a:off x="432000" y="836230"/>
-            <a:ext cx="9036000" cy="307540"/>
+            <a:off x="432000" y="817379"/>
+            <a:ext cx="9036000" cy="345243"/>
           </a:xfrm>
           <a:prstGeom prst="rect">
             <a:avLst/>
@@ -3107,7 +3055,7 @@
               </a:lnSpc>
             </a:pPr>
             <a:r>
-              <a:rPr lang="en-US" altLang="ja-JP" sz="1400" dirty="0">
+              <a:rPr lang="en-US" altLang="ja-JP" sz="1600" dirty="0">
                 <a:solidFill>
                   <a:srgbClr val="333333"/>
                 </a:solidFill>
@@ -3118,7 +3066,7 @@
               <a:t>LINE</a:t>
             </a:r>
             <a:r>
-              <a:rPr lang="ja-JP" altLang="en-US" sz="1400" dirty="0">
+              <a:rPr lang="ja-JP" altLang="en-US" sz="1600" dirty="0">
                 <a:solidFill>
                   <a:srgbClr val="333333"/>
                 </a:solidFill>
@@ -3129,7 +3077,7 @@
               <a:t>で、</a:t>
             </a:r>
             <a:r>
-              <a:rPr sz="1400" dirty="0" err="1">
+              <a:rPr sz="1600" dirty="0" err="1">
                 <a:solidFill>
                   <a:srgbClr val="333333"/>
                 </a:solidFill>
@@ -3140,7 +3088,7 @@
               <a:t>来店・成約・リピート</a:t>
             </a:r>
             <a:r>
-              <a:rPr lang="ja-JP" altLang="en-US" sz="1400" dirty="0">
+              <a:rPr lang="ja-JP" altLang="en-US" sz="1600" dirty="0">
                 <a:solidFill>
                   <a:srgbClr val="333333"/>
                 </a:solidFill>
@@ -3150,7 +3098,7 @@
               </a:rPr>
               <a:t>まで追う</a:t>
             </a:r>
-            <a:endParaRPr sz="1400" dirty="0">
+            <a:endParaRPr sz="1600" dirty="0">
               <a:solidFill>
                 <a:srgbClr val="333333"/>
               </a:solidFill>
@@ -3483,7 +3431,7 @@
         </p:nvSpPr>
         <p:spPr>
           <a:xfrm>
-            <a:off x="432000" y="4843801"/>
+            <a:off x="432000" y="4212001"/>
             <a:ext cx="9043200" cy="503999"/>
           </a:xfrm>
           <a:prstGeom prst="roundRect">
@@ -3575,7 +3523,7 @@
           </a:fontRef>
         </p:style>
         <p:txBody>
-          <a:bodyPr rtlCol="0" anchor="ctr" wrap="square" lIns="54000" rIns="54000" tIns="18000" bIns="18000"/>
+          <a:bodyPr wrap="square" lIns="54000" tIns="18000" rIns="54000" bIns="18000" rtlCol="0" anchor="ctr"/>
           <a:lstStyle/>
           <a:p>
             <a:pPr algn="ctr">
@@ -3674,7 +3622,7 @@
           </a:fontRef>
         </p:style>
         <p:txBody>
-          <a:bodyPr rtlCol="0" anchor="ctr" wrap="square" lIns="54000" rIns="54000" tIns="18000" bIns="18000"/>
+          <a:bodyPr wrap="square" lIns="54000" tIns="18000" rIns="54000" bIns="18000" rtlCol="0" anchor="ctr"/>
           <a:lstStyle/>
           <a:p>
             <a:pPr algn="ctr">
@@ -3753,7 +3701,7 @@
           </a:fontRef>
         </p:style>
         <p:txBody>
-          <a:bodyPr rtlCol="0" anchor="ctr" wrap="square" lIns="36000" rIns="36000" tIns="0" bIns="0"/>
+          <a:bodyPr wrap="square" lIns="36000" tIns="0" rIns="36000" bIns="0" rtlCol="0" anchor="ctr"/>
           <a:lstStyle/>
           <a:p>
             <a:pPr algn="ctr"/>
@@ -3810,7 +3758,7 @@
           </a:fontRef>
         </p:style>
         <p:txBody>
-          <a:bodyPr rtlCol="0" anchor="ctr" wrap="square" lIns="36000" rIns="36000" tIns="0" bIns="0"/>
+          <a:bodyPr wrap="square" lIns="36000" tIns="0" rIns="36000" bIns="0" rtlCol="0" anchor="ctr"/>
           <a:lstStyle/>
           <a:p>
             <a:pPr algn="ctr"/>
@@ -3824,63 +3772,6 @@
                 <a:cs typeface="メイリオ"/>
               </a:rPr>
               <a:t>LINEで追えるところ：来店・成約・リピートまで</a:t>
-            </a:r>
-          </a:p>
-        </p:txBody>
-      </p:sp>
-      <p:sp>
-        <p:nvSpPr>
-          <p:cNvPr id="19" name="Rounded Rectangle 18"/>
-          <p:cNvSpPr/>
-          <p:nvPr/>
-        </p:nvSpPr>
-        <p:spPr>
-          <a:xfrm>
-            <a:off x="5256000" y="3943800"/>
-            <a:ext cx="4219200" cy="396000"/>
-          </a:xfrm>
-          <a:prstGeom prst="roundRect">
-            <a:avLst>
-              <a:gd name="adj" fmla="val 10000"/>
-            </a:avLst>
-          </a:prstGeom>
-          <a:solidFill>
-            <a:srgbClr val="EDEDED"/>
-          </a:solidFill>
-          <a:ln>
-            <a:noFill/>
-          </a:ln>
-          <a:effectLst/>
-        </p:spPr>
-        <p:style>
-          <a:lnRef idx="1">
-            <a:schemeClr val="accent1"/>
-          </a:lnRef>
-          <a:fillRef idx="3">
-            <a:schemeClr val="accent1"/>
-          </a:fillRef>
-          <a:effectRef idx="2">
-            <a:schemeClr val="accent1"/>
-          </a:effectRef>
-          <a:fontRef idx="minor">
-            <a:schemeClr val="lt1"/>
-          </a:fontRef>
-        </p:style>
-        <p:txBody>
-          <a:bodyPr rtlCol="0" anchor="ctr" wrap="square" lIns="50400" rIns="50400" tIns="21600" bIns="21600"/>
-          <a:lstStyle/>
-          <a:p>
-            <a:pPr algn="ctr"/>
-            <a:r>
-              <a:rPr sz="1100" b="1">
-                <a:solidFill>
-                  <a:srgbClr val="7F7F7F"/>
-                </a:solidFill>
-                <a:latin typeface="メイリオ"/>
-                <a:ea typeface="メイリオ"/>
-                <a:cs typeface="メイリオ"/>
-              </a:rPr>
-              <a:t>今はメール・電話だけ → 読まれない・つながらない</a:t>
             </a:r>
           </a:p>
         </p:txBody>
@@ -3966,8 +3857,8 @@
         </p:nvSpPr>
         <p:spPr>
           <a:xfrm>
-            <a:off x="432000" y="696191"/>
-            <a:ext cx="9036000" cy="587617"/>
+            <a:off x="432000" y="657334"/>
+            <a:ext cx="9036000" cy="665331"/>
           </a:xfrm>
           <a:prstGeom prst="rect">
             <a:avLst/>
@@ -3986,7 +3877,7 @@
               </a:lnSpc>
             </a:pPr>
             <a:r>
-              <a:rPr sz="1400" dirty="0" err="1">
+              <a:rPr sz="1600" dirty="0" err="1">
                 <a:solidFill>
                   <a:srgbClr val="333333"/>
                 </a:solidFill>
@@ -3997,7 +3888,7 @@
               <a:t>申込みの完了画面から、そのままLINEへ</a:t>
             </a:r>
             <a:r>
-              <a:rPr sz="1400" dirty="0">
+              <a:rPr sz="1600" dirty="0">
                 <a:solidFill>
                   <a:srgbClr val="333333"/>
                 </a:solidFill>
@@ -4007,7 +3898,7 @@
               </a:rPr>
               <a:t>。</a:t>
             </a:r>
-            <a:endParaRPr lang="en-US" sz="1400" dirty="0">
+            <a:endParaRPr lang="en-US" sz="1600" dirty="0">
               <a:solidFill>
                 <a:srgbClr val="333333"/>
               </a:solidFill>
@@ -4023,7 +3914,7 @@
               </a:lnSpc>
             </a:pPr>
             <a:r>
-              <a:rPr sz="1400" dirty="0" err="1">
+              <a:rPr sz="1600" dirty="0" err="1">
                 <a:solidFill>
                   <a:srgbClr val="333333"/>
                 </a:solidFill>
@@ -4034,7 +3925,7 @@
               <a:t>関心が一番高いタイミング</a:t>
             </a:r>
             <a:r>
-              <a:rPr lang="ja-JP" altLang="en-US" sz="1400" dirty="0">
+              <a:rPr lang="ja-JP" altLang="en-US" sz="1600" dirty="0">
                 <a:solidFill>
                   <a:srgbClr val="333333"/>
                 </a:solidFill>
@@ -4045,7 +3936,7 @@
               <a:t>＝</a:t>
             </a:r>
             <a:r>
-              <a:rPr sz="1400" dirty="0" err="1">
+              <a:rPr sz="1600" dirty="0" err="1">
                 <a:solidFill>
                   <a:srgbClr val="333333"/>
                 </a:solidFill>
@@ -4056,7 +3947,7 @@
               <a:t>友だちに</a:t>
             </a:r>
             <a:r>
-              <a:rPr lang="ja-JP" altLang="en-US" sz="1400" dirty="0">
+              <a:rPr lang="ja-JP" altLang="en-US" sz="1600" dirty="0">
                 <a:solidFill>
                   <a:srgbClr val="333333"/>
                 </a:solidFill>
@@ -4066,7 +3957,7 @@
               </a:rPr>
               <a:t>なりやすい</a:t>
             </a:r>
-            <a:endParaRPr sz="1400" dirty="0">
+            <a:endParaRPr sz="1600" dirty="0">
               <a:solidFill>
                 <a:srgbClr val="333333"/>
               </a:solidFill>
@@ -5024,6 +4915,7 @@
           <a:lstStyle/>
           <a:p>
             <a:pPr algn="ctr"/>
+            <a:endParaRPr sz="2400"/>
           </a:p>
         </p:txBody>
       </p:sp>
@@ -5066,12 +4958,12 @@
           </a:fontRef>
         </p:style>
         <p:txBody>
-          <a:bodyPr rtlCol="0" anchor="ctr" wrap="square" lIns="36000" rIns="36000" tIns="0" bIns="0"/>
+          <a:bodyPr wrap="square" lIns="36000" tIns="0" rIns="36000" bIns="0" rtlCol="0" anchor="ctr"/>
           <a:lstStyle/>
           <a:p>
             <a:pPr algn="ctr"/>
             <a:r>
-              <a:rPr sz="1100" b="1">
+              <a:rPr sz="1400" b="1">
                 <a:solidFill>
                   <a:srgbClr val="FFFFFF"/>
                 </a:solidFill>
@@ -5092,8 +4984,8 @@
         </p:nvSpPr>
         <p:spPr>
           <a:xfrm>
-            <a:off x="2253600" y="4896000"/>
-            <a:ext cx="2520000" cy="432000"/>
+            <a:off x="2253600" y="4951689"/>
+            <a:ext cx="2520000" cy="320621"/>
           </a:xfrm>
           <a:prstGeom prst="rect">
             <a:avLst/>
@@ -5101,14 +4993,14 @@
           <a:noFill/>
         </p:spPr>
         <p:txBody>
-          <a:bodyPr wrap="square" lIns="0" rIns="50400" tIns="21600" bIns="21600" anchor="ctr">
+          <a:bodyPr wrap="square" lIns="0" tIns="21600" rIns="50400" bIns="21600" anchor="ctr">
             <a:spAutoFit/>
           </a:bodyPr>
           <a:lstStyle/>
           <a:p>
             <a:pPr algn="l"/>
             <a:r>
-              <a:rPr sz="1050" b="1">
+              <a:rPr sz="1200" b="1">
                 <a:solidFill>
                   <a:srgbClr val="333333"/>
                 </a:solidFill>
@@ -5119,7 +5011,7 @@
               <a:t>初期 </a:t>
             </a:r>
             <a:r>
-              <a:rPr sz="1400" b="1">
+              <a:rPr b="1">
                 <a:solidFill>
                   <a:srgbClr val="1F285A"/>
                 </a:solidFill>
@@ -5130,7 +5022,7 @@
               <a:t>10万円</a:t>
             </a:r>
             <a:r>
-              <a:rPr sz="1050" b="1">
+              <a:rPr sz="1200" b="1">
                 <a:solidFill>
                   <a:srgbClr val="333333"/>
                 </a:solidFill>
@@ -5141,7 +5033,7 @@
               <a:t>　月額 </a:t>
             </a:r>
             <a:r>
-              <a:rPr sz="1400" b="1">
+              <a:rPr b="1">
                 <a:solidFill>
                   <a:srgbClr val="1F285A"/>
                 </a:solidFill>
@@ -5197,8 +5089,8 @@
         </p:nvSpPr>
         <p:spPr>
           <a:xfrm>
-            <a:off x="4953600" y="4896000"/>
-            <a:ext cx="3491999" cy="432000"/>
+            <a:off x="4953600" y="4922195"/>
+            <a:ext cx="3491999" cy="379611"/>
           </a:xfrm>
           <a:prstGeom prst="rect">
             <a:avLst/>
@@ -5206,7 +5098,7 @@
           <a:noFill/>
         </p:spPr>
         <p:txBody>
-          <a:bodyPr wrap="square" lIns="0" rIns="50400" tIns="21600" bIns="21600" anchor="ctr">
+          <a:bodyPr wrap="square" lIns="0" tIns="21600" rIns="50400" bIns="21600" anchor="ctr">
             <a:spAutoFit/>
           </a:bodyPr>
           <a:lstStyle/>
@@ -5217,7 +5109,7 @@
               </a:spcAft>
             </a:pPr>
             <a:r>
-              <a:rPr sz="950">
+              <a:rPr sz="1050" dirty="0">
                 <a:solidFill>
                   <a:srgbClr val="333333"/>
                 </a:solidFill>
@@ -5225,13 +5117,32 @@
                 <a:ea typeface="メイリオ"/>
                 <a:cs typeface="メイリオ"/>
               </a:rPr>
-              <a:t>✓ 今お使いのAPIツール（Lステップ等）と併用できます</a:t>
-            </a:r>
+              <a:t> </a:t>
+            </a:r>
+            <a:r>
+              <a:rPr sz="1050" dirty="0" err="1">
+                <a:solidFill>
+                  <a:srgbClr val="333333"/>
+                </a:solidFill>
+                <a:latin typeface="メイリオ"/>
+                <a:ea typeface="メイリオ"/>
+                <a:cs typeface="メイリオ"/>
+              </a:rPr>
+              <a:t>今お使いのAPIツール（Lステップ等）と併用できます</a:t>
+            </a:r>
+            <a:endParaRPr sz="1050" dirty="0">
+              <a:solidFill>
+                <a:srgbClr val="333333"/>
+              </a:solidFill>
+              <a:latin typeface="メイリオ"/>
+              <a:ea typeface="メイリオ"/>
+              <a:cs typeface="メイリオ"/>
+            </a:endParaRPr>
           </a:p>
           <a:p>
             <a:pPr algn="l"/>
             <a:r>
-              <a:rPr sz="950">
+              <a:rPr sz="1050" dirty="0">
                 <a:solidFill>
                   <a:srgbClr val="333333"/>
                 </a:solidFill>
@@ -5239,8 +5150,27 @@
                 <a:ea typeface="メイリオ"/>
                 <a:cs typeface="メイリオ"/>
               </a:rPr>
-              <a:t>✓ 案内を置く完了画面を増やす場合は、追加費用</a:t>
-            </a:r>
+              <a:t> </a:t>
+            </a:r>
+            <a:r>
+              <a:rPr sz="1050" dirty="0" err="1">
+                <a:solidFill>
+                  <a:srgbClr val="333333"/>
+                </a:solidFill>
+                <a:latin typeface="メイリオ"/>
+                <a:ea typeface="メイリオ"/>
+                <a:cs typeface="メイリオ"/>
+              </a:rPr>
+              <a:t>案内を置く完了画面を増やす場合は、追加費用</a:t>
+            </a:r>
+            <a:endParaRPr sz="1050" dirty="0">
+              <a:solidFill>
+                <a:srgbClr val="333333"/>
+              </a:solidFill>
+              <a:latin typeface="メイリオ"/>
+              <a:ea typeface="メイリオ"/>
+              <a:cs typeface="メイリオ"/>
+            </a:endParaRPr>
           </a:p>
         </p:txBody>
       </p:sp>
@@ -5319,8 +5249,8 @@
         </p:nvSpPr>
         <p:spPr>
           <a:xfrm>
-            <a:off x="432000" y="836230"/>
-            <a:ext cx="9036000" cy="307540"/>
+            <a:off x="432000" y="817379"/>
+            <a:ext cx="9036000" cy="345243"/>
           </a:xfrm>
           <a:prstGeom prst="rect">
             <a:avLst/>
@@ -5339,7 +5269,7 @@
               </a:lnSpc>
             </a:pPr>
             <a:r>
-              <a:rPr sz="1400" dirty="0" err="1">
+              <a:rPr sz="1600" dirty="0" err="1">
                 <a:solidFill>
                   <a:srgbClr val="333333"/>
                 </a:solidFill>
@@ -5350,7 +5280,7 @@
               <a:t>申込んだ方に合わせて、LINEで次の一歩</a:t>
             </a:r>
             <a:r>
-              <a:rPr lang="ja-JP" altLang="en-US" sz="1400" dirty="0">
+              <a:rPr lang="ja-JP" altLang="en-US" sz="1600" dirty="0">
                 <a:solidFill>
                   <a:srgbClr val="333333"/>
                 </a:solidFill>
@@ -5360,7 +5290,7 @@
               </a:rPr>
               <a:t>へとつなげる</a:t>
             </a:r>
-            <a:endParaRPr sz="1400" dirty="0">
+            <a:endParaRPr sz="1600" dirty="0">
               <a:solidFill>
                 <a:srgbClr val="333333"/>
               </a:solidFill>
@@ -6408,8 +6338,8 @@
         </p:nvSpPr>
         <p:spPr>
           <a:xfrm>
-            <a:off x="432000" y="836230"/>
-            <a:ext cx="9036000" cy="307540"/>
+            <a:off x="432000" y="817379"/>
+            <a:ext cx="9036000" cy="345243"/>
           </a:xfrm>
           <a:prstGeom prst="rect">
             <a:avLst/>
@@ -6428,7 +6358,7 @@
               </a:lnSpc>
             </a:pPr>
             <a:r>
-              <a:rPr sz="1400" dirty="0" err="1">
+              <a:rPr sz="1600" dirty="0" err="1">
                 <a:solidFill>
                   <a:srgbClr val="333333"/>
                 </a:solidFill>
@@ -6439,7 +6369,7 @@
               <a:t>同じ広告費のまま、申込みの「後」を伸ばして成約</a:t>
             </a:r>
             <a:r>
-              <a:rPr lang="ja-JP" altLang="en-US" sz="1400" dirty="0">
+              <a:rPr lang="ja-JP" altLang="en-US" sz="1600" dirty="0">
                 <a:solidFill>
                   <a:srgbClr val="333333"/>
                 </a:solidFill>
@@ -6449,7 +6379,7 @@
               </a:rPr>
               <a:t>数増加へ</a:t>
             </a:r>
-            <a:endParaRPr sz="1400" dirty="0">
+            <a:endParaRPr sz="1600" dirty="0">
               <a:solidFill>
                 <a:srgbClr val="333333"/>
               </a:solidFill>
@@ -7584,8 +7514,8 @@
         </p:nvSpPr>
         <p:spPr>
           <a:xfrm>
-            <a:off x="432000" y="648000"/>
-            <a:ext cx="9036000" cy="684000"/>
+            <a:off x="432000" y="817379"/>
+            <a:ext cx="9036000" cy="345243"/>
           </a:xfrm>
           <a:prstGeom prst="rect">
             <a:avLst/>
@@ -7607,7 +7537,7 @@
               </a:spcAft>
             </a:pPr>
             <a:r>
-              <a:rPr sz="1400" b="1">
+              <a:rPr sz="1600" dirty="0">
                 <a:solidFill>
                   <a:srgbClr val="1F285A"/>
                 </a:solidFill>
@@ -7616,24 +7546,6 @@
                 <a:cs typeface="メイリオ"/>
               </a:rPr>
               <a:t>広告の予算に、月3万円〜を足すだけ。</a:t>
-            </a:r>
-          </a:p>
-          <a:p>
-            <a:pPr algn="l">
-              <a:lnSpc>
-                <a:spcPct val="130000"/>
-              </a:lnSpc>
-            </a:pPr>
-            <a:r>
-              <a:rPr sz="1250">
-                <a:solidFill>
-                  <a:srgbClr val="333333"/>
-                </a:solidFill>
-                <a:latin typeface="メイリオ"/>
-                <a:ea typeface="メイリオ"/>
-                <a:cs typeface="メイリオ"/>
-              </a:rPr>
-              <a:t>完了画面にLINEへの案内を置けば、広告で集めた申込みを売上までつなげる仕組みが、広告と同時に始められます。</a:t>
             </a:r>
           </a:p>
         </p:txBody>
